--- a/Y9_Exploring_Science/9A_Genetics_and_evolution/9A_L07_Natural_selection_and_evolution.pptx
+++ b/Y9_Exploring_Science/9A_Genetics_and_evolution/9A_L07_Natural_selection_and_evolution.pptx
@@ -1829,7 +1829,7 @@
         <p:spPr>
           <a:xfrm>
             <a:off x="548640" y="3657600"/>
-            <a:ext cx="10515600" cy="914400"/>
+            <a:ext cx="10515600" cy="1097280"/>
           </a:xfrm>
           <a:prstGeom prst="rect">
             <a:avLst/>
@@ -1842,7 +1842,7 @@
           <a:lstStyle>
             <a:lvl1pPr indent="0" marL="0">
               <a:buNone/>
-              <a:defRPr lang="en-US" sz="2000" dirty="0">
+              <a:defRPr lang="en-US" sz="2400" dirty="0">
                 <a:solidFill>
                   <a:srgbClr val="FFFFFF"/>
                 </a:solidFill>
@@ -1853,7 +1853,7 @@
             <a:pPr indent="0" marL="0">
               <a:buNone/>
             </a:pPr>
-            <a:endParaRPr lang="en-US" sz="2000" dirty="0"/>
+            <a:endParaRPr lang="en-US" sz="2400" dirty="0"/>
           </a:p>
         </p:txBody>
       </p:sp>
@@ -1953,14 +1953,14 @@
               <a:buNone/>
             </a:pPr>
             <a:r>
-              <a:rPr lang="en-US" sz="900" dirty="0">
+              <a:rPr lang="en-US" sz="1000" dirty="0">
                 <a:solidFill>
                   <a:srgbClr val="5B6574"/>
                 </a:solidFill>
               </a:rPr>
               <a:t>Year 9 Science  |  9A Genetics and evolution  |  Lesson 7: Natural selection and evolution</a:t>
             </a:r>
-            <a:endParaRPr lang="en-US" sz="900" dirty="0"/>
+            <a:endParaRPr lang="en-US" sz="1000" dirty="0"/>
           </a:p>
         </p:txBody>
       </p:sp>
@@ -2129,14 +2129,14 @@
               <a:buNone/>
             </a:pPr>
             <a:r>
-              <a:rPr lang="en-US" sz="900" dirty="0">
+              <a:rPr lang="en-US" sz="1000" dirty="0">
                 <a:solidFill>
                   <a:srgbClr val="5B6574"/>
                 </a:solidFill>
               </a:rPr>
               <a:t>Year 9 Science  |  9A Genetics and evolution  |  Lesson 7: Natural selection and evolution</a:t>
             </a:r>
-            <a:endParaRPr lang="en-US" sz="900" dirty="0"/>
+            <a:endParaRPr lang="en-US" sz="1000" dirty="0"/>
           </a:p>
         </p:txBody>
       </p:sp>
@@ -2305,14 +2305,14 @@
               <a:buNone/>
             </a:pPr>
             <a:r>
-              <a:rPr lang="en-US" sz="900" dirty="0">
+              <a:rPr lang="en-US" sz="1000" dirty="0">
                 <a:solidFill>
                   <a:srgbClr val="5B6574"/>
                 </a:solidFill>
               </a:rPr>
               <a:t>Year 9 Science  |  9A Genetics and evolution  |  Lesson 7: Natural selection and evolution</a:t>
             </a:r>
-            <a:endParaRPr lang="en-US" sz="900" dirty="0"/>
+            <a:endParaRPr lang="en-US" sz="1000" dirty="0"/>
           </a:p>
         </p:txBody>
       </p:sp>
@@ -2441,7 +2441,7 @@
           <a:lstStyle>
             <a:lvl1pPr indent="0" marL="0">
               <a:buNone/>
-              <a:defRPr lang="en-US" sz="3000" b="1" dirty="0">
+              <a:defRPr lang="en-US" sz="3400" b="1" dirty="0">
                 <a:solidFill>
                   <a:srgbClr val="3A2E00"/>
                 </a:solidFill>
@@ -2452,7 +2452,7 @@
             <a:pPr indent="0" marL="0">
               <a:buNone/>
             </a:pPr>
-            <a:endParaRPr lang="en-US" sz="3000" dirty="0"/>
+            <a:endParaRPr lang="en-US" sz="3400" dirty="0"/>
           </a:p>
         </p:txBody>
       </p:sp>
@@ -2869,14 +2869,14 @@
               <a:buNone/>
             </a:pPr>
             <a:r>
-              <a:rPr lang="en-US" sz="1300" b="1" spc="200" kern="0" dirty="0">
+              <a:rPr lang="en-US" sz="1400" b="1" spc="200" kern="0" dirty="0">
                 <a:solidFill>
                   <a:srgbClr val="F2CE3E"/>
                 </a:solidFill>
               </a:rPr>
               <a:t>YEAR 9 SCIENCE  ·  9A GENETICS AND EVOLUTION  ·  LESSON 7 OF 7</a:t>
             </a:r>
-            <a:endParaRPr lang="en-US" sz="1300" dirty="0"/>
+            <a:endParaRPr lang="en-US" sz="1400" dirty="0"/>
           </a:p>
         </p:txBody>
       </p:sp>
@@ -2929,7 +2929,7 @@
         <p:spPr>
           <a:xfrm>
             <a:off x="548640" y="3657600"/>
-            <a:ext cx="10515600" cy="914400"/>
+            <a:ext cx="10515600" cy="1097280"/>
           </a:xfrm>
           <a:prstGeom prst="rect">
             <a:avLst/>
@@ -2945,14 +2945,14 @@
               <a:buNone/>
             </a:pPr>
             <a:r>
-              <a:rPr lang="en-US" sz="2000" dirty="0">
+              <a:rPr lang="en-US" sz="2400" dirty="0">
                 <a:solidFill>
                   <a:srgbClr val="FFFFFF"/>
                 </a:solidFill>
               </a:rPr>
               <a:t>What is Darwin's theory of evolution?</a:t>
             </a:r>
-            <a:endParaRPr lang="en-US" sz="2000" dirty="0"/>
+            <a:endParaRPr lang="en-US" sz="2400" dirty="0"/>
           </a:p>
         </p:txBody>
       </p:sp>
@@ -2981,14 +2981,14 @@
               <a:buNone/>
             </a:pPr>
             <a:r>
-              <a:rPr lang="en-US" sz="1200" dirty="0">
+              <a:rPr lang="en-US" sz="1400" dirty="0">
                 <a:solidFill>
                   <a:srgbClr val="C9D3E6"/>
                 </a:solidFill>
               </a:rPr>
               <a:t>Exploring Science International 9  ·  Student Book pages 18 to 20  ·  Workbook pages 13 to 14</a:t>
             </a:r>
-            <a:endParaRPr lang="en-US" sz="1200" dirty="0"/>
+            <a:endParaRPr lang="en-US" sz="1400" dirty="0"/>
           </a:p>
         </p:txBody>
       </p:sp>
@@ -3296,23 +3296,21 @@
           <a:ln/>
         </p:spPr>
         <p:txBody>
-          <a:bodyPr wrap="square" lIns="0" tIns="0" rIns="0" bIns="0" rtlCol="0" anchor="t">
-            <a:normAutofit/>
-          </a:bodyPr>
+          <a:bodyPr wrap="square" lIns="0" tIns="0" rIns="0" bIns="0" rtlCol="0" anchor="t"/>
           <a:lstStyle/>
           <a:p>
             <a:pPr indent="0" marL="0">
               <a:buNone/>
             </a:pPr>
             <a:r>
-              <a:rPr lang="en-US" sz="1700" dirty="0">
+              <a:rPr lang="en-US" sz="2000" dirty="0">
                 <a:solidFill>
                   <a:srgbClr val="141B26"/>
                 </a:solidFill>
               </a:rPr>
               <a:t>Scatter 20 white and 20 black paper 'moths' on the black sheet.</a:t>
             </a:r>
-            <a:endParaRPr lang="en-US" sz="1700" dirty="0"/>
+            <a:endParaRPr lang="en-US" sz="2000" dirty="0"/>
           </a:p>
         </p:txBody>
       </p:sp>
@@ -3395,23 +3393,21 @@
           <a:ln/>
         </p:spPr>
         <p:txBody>
-          <a:bodyPr wrap="square" lIns="0" tIns="0" rIns="0" bIns="0" rtlCol="0" anchor="t">
-            <a:normAutofit/>
-          </a:bodyPr>
+          <a:bodyPr wrap="square" lIns="0" tIns="0" rIns="0" bIns="0" rtlCol="0" anchor="t"/>
           <a:lstStyle/>
           <a:p>
             <a:pPr indent="0" marL="0">
               <a:buNone/>
             </a:pPr>
             <a:r>
-              <a:rPr lang="en-US" sz="1700" dirty="0">
+              <a:rPr lang="en-US" sz="2000" dirty="0">
                 <a:solidFill>
                   <a:srgbClr val="141B26"/>
                 </a:solidFill>
               </a:rPr>
               <a:t>One student is the bird: pick up as many moths as you can in 10 seconds.</a:t>
             </a:r>
-            <a:endParaRPr lang="en-US" sz="1700" dirty="0"/>
+            <a:endParaRPr lang="en-US" sz="2000" dirty="0"/>
           </a:p>
         </p:txBody>
       </p:sp>
@@ -3494,23 +3490,21 @@
           <a:ln/>
         </p:spPr>
         <p:txBody>
-          <a:bodyPr wrap="square" lIns="0" tIns="0" rIns="0" bIns="0" rtlCol="0" anchor="t">
-            <a:normAutofit/>
-          </a:bodyPr>
+          <a:bodyPr wrap="square" lIns="0" tIns="0" rIns="0" bIns="0" rtlCol="0" anchor="t"/>
           <a:lstStyle/>
           <a:p>
             <a:pPr indent="0" marL="0">
               <a:buNone/>
             </a:pPr>
             <a:r>
-              <a:rPr lang="en-US" sz="1700" dirty="0">
+              <a:rPr lang="en-US" sz="2000" dirty="0">
                 <a:solidFill>
                   <a:srgbClr val="141B26"/>
                 </a:solidFill>
               </a:rPr>
               <a:t>Count the survivors of each colour. Each survivor 'reproduces': add one moth of the same colour.</a:t>
             </a:r>
-            <a:endParaRPr lang="en-US" sz="1700" dirty="0"/>
+            <a:endParaRPr lang="en-US" sz="2000" dirty="0"/>
           </a:p>
         </p:txBody>
       </p:sp>
@@ -3593,23 +3587,21 @@
           <a:ln/>
         </p:spPr>
         <p:txBody>
-          <a:bodyPr wrap="square" lIns="0" tIns="0" rIns="0" bIns="0" rtlCol="0" anchor="t">
-            <a:normAutofit/>
-          </a:bodyPr>
+          <a:bodyPr wrap="square" lIns="0" tIns="0" rIns="0" bIns="0" rtlCol="0" anchor="t"/>
           <a:lstStyle/>
           <a:p>
             <a:pPr indent="0" marL="0">
               <a:buNone/>
             </a:pPr>
             <a:r>
-              <a:rPr lang="en-US" sz="1700" dirty="0">
+              <a:rPr lang="en-US" sz="2000" dirty="0">
                 <a:solidFill>
                   <a:srgbClr val="141B26"/>
                 </a:solidFill>
               </a:rPr>
               <a:t>Repeat for three generations and record the numbers. Then try the white sheet.</a:t>
             </a:r>
-            <a:endParaRPr lang="en-US" sz="1700" dirty="0"/>
+            <a:endParaRPr lang="en-US" sz="2000" dirty="0"/>
           </a:p>
         </p:txBody>
       </p:sp>
@@ -3692,23 +3684,21 @@
           <a:ln/>
         </p:spPr>
         <p:txBody>
-          <a:bodyPr wrap="square" lIns="0" tIns="0" rIns="0" bIns="0" rtlCol="0" anchor="t">
-            <a:normAutofit/>
-          </a:bodyPr>
+          <a:bodyPr wrap="square" lIns="0" tIns="0" rIns="0" bIns="0" rtlCol="0" anchor="t"/>
           <a:lstStyle/>
           <a:p>
             <a:pPr indent="0" marL="0">
               <a:buNone/>
             </a:pPr>
             <a:r>
-              <a:rPr lang="en-US" sz="1700" dirty="0">
+              <a:rPr lang="en-US" sz="2000" dirty="0">
                 <a:solidFill>
                   <a:srgbClr val="141B26"/>
                 </a:solidFill>
               </a:rPr>
               <a:t>Predict first: which colour will increase on each sheet?</a:t>
             </a:r>
-            <a:endParaRPr lang="en-US" sz="1700" dirty="0"/>
+            <a:endParaRPr lang="en-US" sz="2000" dirty="0"/>
           </a:p>
         </p:txBody>
       </p:sp>
@@ -3737,14 +3727,14 @@
               <a:buNone/>
             </a:pPr>
             <a:r>
-              <a:rPr lang="en-US" sz="1300" i="1" dirty="0">
+              <a:rPr lang="en-US" sz="1500" i="1" dirty="0">
                 <a:solidFill>
                   <a:srgbClr val="5B6574"/>
                 </a:solidFill>
               </a:rPr>
               <a:t>A model is a simpler version of the real thing. What does the model leave out?</a:t>
             </a:r>
-            <a:endParaRPr lang="en-US" sz="1300" dirty="0"/>
+            <a:endParaRPr lang="en-US" sz="1500" dirty="0"/>
           </a:p>
         </p:txBody>
       </p:sp>
@@ -4073,23 +4063,21 @@
           <a:ln/>
         </p:spPr>
         <p:txBody>
-          <a:bodyPr wrap="square" lIns="0" tIns="0" rIns="0" bIns="0" rtlCol="0" anchor="t">
-            <a:normAutofit/>
-          </a:bodyPr>
+          <a:bodyPr wrap="square" lIns="0" tIns="0" rIns="0" bIns="0" rtlCol="0" anchor="t"/>
           <a:lstStyle/>
           <a:p>
             <a:pPr indent="0" marL="0">
               <a:buNone/>
             </a:pPr>
             <a:r>
-              <a:rPr lang="en-US" sz="1700" dirty="0">
+              <a:rPr lang="en-US" sz="1900" dirty="0">
                 <a:solidFill>
                   <a:srgbClr val="141B26"/>
                 </a:solidFill>
               </a:rPr>
               <a:t>Core: what causes inherited variation; put the lizard story in order; explain the peppered moths and predict what has happened since the factories closed.</a:t>
             </a:r>
-            <a:endParaRPr lang="en-US" sz="1700" dirty="0"/>
+            <a:endParaRPr lang="en-US" sz="1900" dirty="0"/>
           </a:p>
         </p:txBody>
       </p:sp>
@@ -4172,23 +4160,21 @@
           <a:ln/>
         </p:spPr>
         <p:txBody>
-          <a:bodyPr wrap="square" lIns="0" tIns="0" rIns="0" bIns="0" rtlCol="0" anchor="t">
-            <a:normAutofit/>
-          </a:bodyPr>
+          <a:bodyPr wrap="square" lIns="0" tIns="0" rIns="0" bIns="0" rtlCol="0" anchor="t"/>
           <a:lstStyle/>
           <a:p>
             <a:pPr indent="0" marL="0">
               <a:buNone/>
             </a:pPr>
             <a:r>
-              <a:rPr lang="en-US" sz="1700" dirty="0">
+              <a:rPr lang="en-US" sz="2000" dirty="0">
                 <a:solidFill>
                   <a:srgbClr val="141B26"/>
                 </a:solidFill>
               </a:rPr>
               <a:t>Stretch: write Darwin's explanation of the long-legged birds; explain how salt tolerance was selected in the tilapia.</a:t>
             </a:r>
-            <a:endParaRPr lang="en-US" sz="1700" dirty="0"/>
+            <a:endParaRPr lang="en-US" sz="2000" dirty="0"/>
           </a:p>
         </p:txBody>
       </p:sp>
@@ -4271,23 +4257,21 @@
           <a:ln/>
         </p:spPr>
         <p:txBody>
-          <a:bodyPr wrap="square" lIns="0" tIns="0" rIns="0" bIns="0" rtlCol="0" anchor="t">
-            <a:normAutofit/>
-          </a:bodyPr>
+          <a:bodyPr wrap="square" lIns="0" tIns="0" rIns="0" bIns="0" rtlCol="0" anchor="t"/>
           <a:lstStyle/>
           <a:p>
             <a:pPr indent="0" marL="0">
               <a:buNone/>
             </a:pPr>
             <a:r>
-              <a:rPr lang="en-US" sz="1700" dirty="0">
+              <a:rPr lang="en-US" sz="2000" dirty="0">
                 <a:solidFill>
                   <a:srgbClr val="141B26"/>
                 </a:solidFill>
               </a:rPr>
               <a:t>Challenge: how two separated populations become different species; mammoth chromosomes, thick hair and why dinosaurs cannot be cloned.</a:t>
             </a:r>
-            <a:endParaRPr lang="en-US" sz="1700" dirty="0"/>
+            <a:endParaRPr lang="en-US" sz="2000" dirty="0"/>
           </a:p>
         </p:txBody>
       </p:sp>
@@ -4370,23 +4354,21 @@
           <a:ln/>
         </p:spPr>
         <p:txBody>
-          <a:bodyPr wrap="square" lIns="0" tIns="0" rIns="0" bIns="0" rtlCol="0" anchor="t">
-            <a:normAutofit/>
-          </a:bodyPr>
+          <a:bodyPr wrap="square" lIns="0" tIns="0" rIns="0" bIns="0" rtlCol="0" anchor="t"/>
           <a:lstStyle/>
           <a:p>
             <a:pPr indent="0" marL="0">
               <a:buNone/>
             </a:pPr>
             <a:r>
-              <a:rPr lang="en-US" sz="1700" dirty="0">
+              <a:rPr lang="en-US" sz="2000" dirty="0">
                 <a:solidFill>
                   <a:srgbClr val="141B26"/>
                 </a:solidFill>
               </a:rPr>
               <a:t>Use the four steps: variation, environment changes, survival and reproduction, next generation.</a:t>
             </a:r>
-            <a:endParaRPr lang="en-US" sz="1700" dirty="0"/>
+            <a:endParaRPr lang="en-US" sz="2000" dirty="0"/>
           </a:p>
         </p:txBody>
       </p:sp>
@@ -4415,14 +4397,14 @@
               <a:buNone/>
             </a:pPr>
             <a:r>
-              <a:rPr lang="en-US" sz="1300" i="1" dirty="0">
+              <a:rPr lang="en-US" sz="1500" i="1" dirty="0">
                 <a:solidFill>
                   <a:srgbClr val="5B6574"/>
                 </a:solidFill>
               </a:rPr>
               <a:t>Never write 'the moths changed colour to survive'. Write 'more of the moths that were already dark survived'.</a:t>
             </a:r>
-            <a:endParaRPr lang="en-US" sz="1300" dirty="0"/>
+            <a:endParaRPr lang="en-US" sz="1500" dirty="0"/>
           </a:p>
         </p:txBody>
       </p:sp>
@@ -4615,23 +4597,21 @@
           <a:ln/>
         </p:spPr>
         <p:txBody>
-          <a:bodyPr wrap="square" lIns="0" tIns="0" rIns="0" bIns="0" rtlCol="0" anchor="t">
-            <a:normAutofit/>
-          </a:bodyPr>
+          <a:bodyPr wrap="square" lIns="0" tIns="0" rIns="0" bIns="0" rtlCol="0" anchor="t"/>
           <a:lstStyle/>
           <a:p>
             <a:pPr indent="0" marL="0">
               <a:buNone/>
             </a:pPr>
             <a:r>
-              <a:rPr lang="en-US" sz="2200" b="1" dirty="0">
+              <a:rPr lang="en-US" sz="2100" b="1" dirty="0">
                 <a:solidFill>
                   <a:srgbClr val="0F2A5F"/>
                 </a:solidFill>
               </a:rPr>
               <a:t>Woolly mammoths became extinct about 4000 years ago, probably because of hunting and a warming Earth. DNA survives in frozen mammoth remains, and some scientists think we could clone a mammoth. Should we? Could we clone a dinosaur?</a:t>
             </a:r>
-            <a:endParaRPr lang="en-US" sz="2200" dirty="0"/>
+            <a:endParaRPr lang="en-US" sz="2100" dirty="0"/>
           </a:p>
         </p:txBody>
       </p:sp>
@@ -4680,9 +4660,7 @@
           <a:ln/>
         </p:spPr>
         <p:txBody>
-          <a:bodyPr wrap="square" lIns="0" tIns="0" rIns="0" bIns="0" rtlCol="0" anchor="t">
-            <a:normAutofit/>
-          </a:bodyPr>
+          <a:bodyPr wrap="square" lIns="0" tIns="0" rIns="0" bIns="0" rtlCol="0" anchor="t"/>
           <a:lstStyle/>
           <a:p>
             <a:pPr indent="0" marL="0">
@@ -4692,14 +4670,14 @@
               <a:buNone/>
             </a:pPr>
             <a:r>
-              <a:rPr lang="en-US" sz="1500" b="1" dirty="0">
+              <a:rPr lang="en-US" sz="1800" b="1" dirty="0">
                 <a:solidFill>
                   <a:srgbClr val="7B3A8E"/>
                 </a:solidFill>
               </a:rPr>
               <a:t>Sentence frames</a:t>
             </a:r>
-            <a:endParaRPr lang="en-US" sz="1500" dirty="0"/>
+            <a:endParaRPr lang="en-US" sz="1800" dirty="0"/>
           </a:p>
           <a:p>
             <a:pPr indent="0" marL="0">
@@ -4709,14 +4687,14 @@
               <a:buNone/>
             </a:pPr>
             <a:r>
-              <a:rPr lang="en-US" sz="1500" dirty="0">
+              <a:rPr lang="en-US" sz="1800" dirty="0">
                 <a:solidFill>
                   <a:srgbClr val="141B26"/>
                 </a:solidFill>
               </a:rPr>
               <a:t>Cloning a mammoth could help us to ___, but ___.</a:t>
             </a:r>
-            <a:endParaRPr lang="en-US" sz="1500" dirty="0"/>
+            <a:endParaRPr lang="en-US" sz="1800" dirty="0"/>
           </a:p>
           <a:p>
             <a:pPr indent="0" marL="0">
@@ -4726,14 +4704,14 @@
               <a:buNone/>
             </a:pPr>
             <a:r>
-              <a:rPr lang="en-US" sz="1500" dirty="0">
+              <a:rPr lang="en-US" sz="1800" dirty="0">
                 <a:solidFill>
                   <a:srgbClr val="141B26"/>
                 </a:solidFill>
               </a:rPr>
               <a:t>A cloned mammoth might not behave naturally because ___.</a:t>
             </a:r>
-            <a:endParaRPr lang="en-US" sz="1500" dirty="0"/>
+            <a:endParaRPr lang="en-US" sz="1800" dirty="0"/>
           </a:p>
           <a:p>
             <a:pPr indent="0" marL="0">
@@ -4743,14 +4721,14 @@
               <a:buNone/>
             </a:pPr>
             <a:r>
-              <a:rPr lang="en-US" sz="1500" dirty="0">
+              <a:rPr lang="en-US" sz="1800" dirty="0">
                 <a:solidFill>
                   <a:srgbClr val="141B26"/>
                 </a:solidFill>
               </a:rPr>
               <a:t>We could not clone a dinosaur because ___.</a:t>
             </a:r>
-            <a:endParaRPr lang="en-US" sz="1500" dirty="0"/>
+            <a:endParaRPr lang="en-US" sz="1800" dirty="0"/>
           </a:p>
         </p:txBody>
       </p:sp>
@@ -4787,7 +4765,7 @@
         <p:spPr>
           <a:xfrm>
             <a:off x="6766560" y="5090949"/>
-            <a:ext cx="4846320" cy="502920"/>
+            <a:ext cx="4846320" cy="548640"/>
           </a:xfrm>
           <a:prstGeom prst="rect">
             <a:avLst/>
@@ -4803,7 +4781,7 @@
               <a:buNone/>
             </a:pPr>
             <a:r>
-              <a:rPr lang="en-US" sz="1100" dirty="0">
+              <a:rPr lang="en-US" sz="1300" dirty="0">
                 <a:solidFill>
                   <a:srgbClr val="141B26"/>
                 </a:solidFill>
@@ -4813,21 +4791,21 @@
             <a:pPr algn="l" indent="0" marL="0">
               <a:buNone/>
             </a:pPr>
-            <a:endParaRPr lang="en-US" sz="1100" dirty="0"/>
+            <a:endParaRPr lang="en-US" sz="1300" dirty="0"/>
           </a:p>
           <a:p>
             <a:pPr algn="l" indent="0" marL="0">
               <a:buNone/>
             </a:pPr>
             <a:r>
-              <a:rPr lang="en-US" sz="800" dirty="0">
+              <a:rPr lang="en-US" sz="900" dirty="0">
                 <a:solidFill>
                   <a:srgbClr val="5B6574"/>
                 </a:solidFill>
               </a:rPr>
               <a:t>Image: jurvetson, CC BY 2.0, via Wikimedia Commons</a:t>
             </a:r>
-            <a:endParaRPr lang="en-US" sz="1100" dirty="0"/>
+            <a:endParaRPr lang="en-US" sz="1300" dirty="0"/>
           </a:p>
         </p:txBody>
       </p:sp>
@@ -5027,14 +5005,14 @@
               <a:buNone/>
             </a:pPr>
             <a:r>
-              <a:rPr lang="en-US" sz="1400" i="1" dirty="0">
+              <a:rPr lang="en-US" sz="1600" i="1" dirty="0">
                 <a:solidFill>
                   <a:srgbClr val="5B6574"/>
                 </a:solidFill>
               </a:rPr>
               <a:t>On your worksheet exit ticket. Work alone. Hand it in as you leave.</a:t>
             </a:r>
-            <a:endParaRPr lang="en-US" sz="1400" dirty="0"/>
+            <a:endParaRPr lang="en-US" sz="1600" dirty="0"/>
           </a:p>
         </p:txBody>
       </p:sp>
@@ -5047,25 +5025,23 @@
         <p:spPr>
           <a:xfrm>
             <a:off x="548640" y="1828800"/>
-            <a:ext cx="10881360" cy="1188720"/>
-          </a:xfrm>
-          <a:prstGeom prst="rect">
-            <a:avLst/>
-          </a:prstGeom>
-          <a:noFill/>
-          <a:ln/>
-        </p:spPr>
-        <p:txBody>
-          <a:bodyPr wrap="square" lIns="0" tIns="0" rIns="0" bIns="0" rtlCol="0" anchor="t">
-            <a:normAutofit/>
-          </a:bodyPr>
+            <a:ext cx="9692640" cy="1188720"/>
+          </a:xfrm>
+          <a:prstGeom prst="rect">
+            <a:avLst/>
+          </a:prstGeom>
+          <a:noFill/>
+          <a:ln/>
+        </p:spPr>
+        <p:txBody>
+          <a:bodyPr wrap="square" lIns="0" tIns="0" rIns="0" bIns="0" rtlCol="0" anchor="t"/>
           <a:lstStyle/>
           <a:p>
             <a:pPr indent="0" marL="0">
               <a:buNone/>
             </a:pPr>
             <a:r>
-              <a:rPr lang="en-US" sz="1800" b="1" dirty="0">
+              <a:rPr lang="en-US" sz="2200" b="1" dirty="0">
                 <a:solidFill>
                   <a:srgbClr val="7B3A8E"/>
                 </a:solidFill>
@@ -5076,14 +5052,14 @@
               <a:buNone/>
             </a:pPr>
             <a:r>
-              <a:rPr lang="en-US" sz="1800" dirty="0">
+              <a:rPr lang="en-US" sz="2200" dirty="0">
                 <a:solidFill>
                   <a:srgbClr val="141B26"/>
                 </a:solidFill>
               </a:rPr>
               <a:t>What is natural selection?</a:t>
             </a:r>
-            <a:endParaRPr lang="en-US" sz="1800" dirty="0"/>
+            <a:endParaRPr lang="en-US" sz="2200" dirty="0"/>
           </a:p>
         </p:txBody>
       </p:sp>
@@ -5096,25 +5072,23 @@
         <p:spPr>
           <a:xfrm>
             <a:off x="548640" y="3017520"/>
-            <a:ext cx="10881360" cy="1188720"/>
-          </a:xfrm>
-          <a:prstGeom prst="rect">
-            <a:avLst/>
-          </a:prstGeom>
-          <a:noFill/>
-          <a:ln/>
-        </p:spPr>
-        <p:txBody>
-          <a:bodyPr wrap="square" lIns="0" tIns="0" rIns="0" bIns="0" rtlCol="0" anchor="t">
-            <a:normAutofit/>
-          </a:bodyPr>
+            <a:ext cx="9692640" cy="1188720"/>
+          </a:xfrm>
+          <a:prstGeom prst="rect">
+            <a:avLst/>
+          </a:prstGeom>
+          <a:noFill/>
+          <a:ln/>
+        </p:spPr>
+        <p:txBody>
+          <a:bodyPr wrap="square" lIns="0" tIns="0" rIns="0" bIns="0" rtlCol="0" anchor="t"/>
           <a:lstStyle/>
           <a:p>
             <a:pPr indent="0" marL="0">
               <a:buNone/>
             </a:pPr>
             <a:r>
-              <a:rPr lang="en-US" sz="1800" b="1" dirty="0">
+              <a:rPr lang="en-US" sz="2200" b="1" dirty="0">
                 <a:solidFill>
                   <a:srgbClr val="7B3A8E"/>
                 </a:solidFill>
@@ -5125,14 +5099,14 @@
               <a:buNone/>
             </a:pPr>
             <a:r>
-              <a:rPr lang="en-US" sz="1800" dirty="0">
+              <a:rPr lang="en-US" sz="2200" dirty="0">
                 <a:solidFill>
                   <a:srgbClr val="141B26"/>
                 </a:solidFill>
               </a:rPr>
               <a:t>What is evolution?</a:t>
             </a:r>
-            <a:endParaRPr lang="en-US" sz="1800" dirty="0"/>
+            <a:endParaRPr lang="en-US" sz="2200" dirty="0"/>
           </a:p>
         </p:txBody>
       </p:sp>
@@ -5145,25 +5119,23 @@
         <p:spPr>
           <a:xfrm>
             <a:off x="548640" y="4206240"/>
-            <a:ext cx="10881360" cy="1188720"/>
-          </a:xfrm>
-          <a:prstGeom prst="rect">
-            <a:avLst/>
-          </a:prstGeom>
-          <a:noFill/>
-          <a:ln/>
-        </p:spPr>
-        <p:txBody>
-          <a:bodyPr wrap="square" lIns="0" tIns="0" rIns="0" bIns="0" rtlCol="0" anchor="t">
-            <a:normAutofit/>
-          </a:bodyPr>
+            <a:ext cx="9692640" cy="1188720"/>
+          </a:xfrm>
+          <a:prstGeom prst="rect">
+            <a:avLst/>
+          </a:prstGeom>
+          <a:noFill/>
+          <a:ln/>
+        </p:spPr>
+        <p:txBody>
+          <a:bodyPr wrap="square" lIns="0" tIns="0" rIns="0" bIns="0" rtlCol="0" anchor="t"/>
           <a:lstStyle/>
           <a:p>
             <a:pPr indent="0" marL="0">
               <a:buNone/>
             </a:pPr>
             <a:r>
-              <a:rPr lang="en-US" sz="1800" b="1" dirty="0">
+              <a:rPr lang="en-US" sz="2200" b="1" dirty="0">
                 <a:solidFill>
                   <a:srgbClr val="7B3A8E"/>
                 </a:solidFill>
@@ -5174,14 +5146,14 @@
               <a:buNone/>
             </a:pPr>
             <a:r>
-              <a:rPr lang="en-US" sz="1800" dirty="0">
+              <a:rPr lang="en-US" sz="2200" dirty="0">
                 <a:solidFill>
                   <a:srgbClr val="141B26"/>
                 </a:solidFill>
               </a:rPr>
               <a:t>Explain why dark peppered moths became more common near Manchester in the 1800s.</a:t>
             </a:r>
-            <a:endParaRPr lang="en-US" sz="1800" dirty="0"/>
+            <a:endParaRPr lang="en-US" sz="2200" dirty="0"/>
           </a:p>
         </p:txBody>
       </p:sp>
@@ -5440,90 +5412,88 @@
         <p:spPr>
           <a:xfrm>
             <a:off x="548640" y="1371600"/>
-            <a:ext cx="10881360" cy="4480560"/>
-          </a:xfrm>
-          <a:prstGeom prst="rect">
-            <a:avLst/>
-          </a:prstGeom>
-          <a:noFill/>
-          <a:ln/>
-        </p:spPr>
-        <p:txBody>
-          <a:bodyPr wrap="square" lIns="0" tIns="0" rIns="0" bIns="0" rtlCol="0" anchor="t">
-            <a:normAutofit/>
-          </a:bodyPr>
+            <a:ext cx="10881360" cy="4114800"/>
+          </a:xfrm>
+          <a:prstGeom prst="rect">
+            <a:avLst/>
+          </a:prstGeom>
+          <a:noFill/>
+          <a:ln/>
+        </p:spPr>
+        <p:txBody>
+          <a:bodyPr wrap="square" lIns="0" tIns="0" rIns="0" bIns="0" rtlCol="0" anchor="t"/>
           <a:lstStyle/>
           <a:p>
             <a:pPr marL="342900" indent="-342900">
               <a:spcAft>
-                <a:spcPts val="1000"/>
+                <a:spcPts val="1200"/>
               </a:spcAft>
               <a:buSzPct val="100000"/>
               <a:buChar char="✓"/>
             </a:pPr>
             <a:r>
-              <a:rPr lang="en-US" sz="1700" dirty="0">
+              <a:rPr lang="en-US" sz="2000" dirty="0">
                 <a:solidFill>
                   <a:srgbClr val="141B26"/>
                 </a:solidFill>
               </a:rPr>
               <a:t>Variation is environmental (not inherited) or inherited (genes, from two gametes fusing at fertilisation).</a:t>
             </a:r>
-            <a:endParaRPr lang="en-US" sz="1700" dirty="0"/>
+            <a:endParaRPr lang="en-US" sz="2000" dirty="0"/>
           </a:p>
           <a:p>
             <a:pPr marL="342900" indent="-342900">
               <a:spcAft>
-                <a:spcPts val="1000"/>
+                <a:spcPts val="1200"/>
               </a:spcAft>
               <a:buSzPct val="100000"/>
               <a:buChar char="✓"/>
             </a:pPr>
             <a:r>
-              <a:rPr lang="en-US" sz="1700" dirty="0">
+              <a:rPr lang="en-US" sz="2000" dirty="0">
                 <a:solidFill>
                   <a:srgbClr val="141B26"/>
                 </a:solidFill>
               </a:rPr>
               <a:t>Genetic information is in genes, on DNA, in chromosomes, in the nucleus: 46 chromosomes in a body cell, 23 in a gamete.</a:t>
             </a:r>
-            <a:endParaRPr lang="en-US" sz="1700" dirty="0"/>
+            <a:endParaRPr lang="en-US" sz="2000" dirty="0"/>
           </a:p>
           <a:p>
             <a:pPr marL="342900" indent="-342900">
               <a:spcAft>
-                <a:spcPts val="1000"/>
+                <a:spcPts val="1200"/>
               </a:spcAft>
               <a:buSzPct val="100000"/>
               <a:buChar char="✓"/>
             </a:pPr>
             <a:r>
-              <a:rPr lang="en-US" sz="1700" dirty="0">
+              <a:rPr lang="en-US" sz="2000" dirty="0">
                 <a:solidFill>
                   <a:srgbClr val="141B26"/>
                 </a:solidFill>
               </a:rPr>
               <a:t>Adaptations come from genes; when the environment changes a species can become endangered or extinct.</a:t>
             </a:r>
-            <a:endParaRPr lang="en-US" sz="1700" dirty="0"/>
+            <a:endParaRPr lang="en-US" sz="2000" dirty="0"/>
           </a:p>
           <a:p>
             <a:pPr marL="342900" indent="-342900">
               <a:spcAft>
-                <a:spcPts val="1000"/>
+                <a:spcPts val="1200"/>
               </a:spcAft>
               <a:buSzPct val="100000"/>
               <a:buChar char="✓"/>
             </a:pPr>
             <a:r>
-              <a:rPr lang="en-US" sz="1700" dirty="0">
+              <a:rPr lang="en-US" sz="2000" dirty="0">
                 <a:solidFill>
                   <a:srgbClr val="141B26"/>
                 </a:solidFill>
               </a:rPr>
               <a:t>Natural selection: the environment selects the inherited variations that survive and reproduce; over many generations this is evolution, and it can produce new species.</a:t>
             </a:r>
-            <a:endParaRPr lang="en-US" sz="1700" dirty="0"/>
+            <a:endParaRPr lang="en-US" sz="2000" dirty="0"/>
           </a:p>
         </p:txBody>
       </p:sp>
@@ -5838,77 +5808,75 @@
           <a:ln/>
         </p:spPr>
         <p:txBody>
-          <a:bodyPr wrap="square" lIns="0" tIns="0" rIns="0" bIns="0" rtlCol="0" anchor="t">
-            <a:normAutofit/>
-          </a:bodyPr>
+          <a:bodyPr wrap="square" lIns="0" tIns="0" rIns="0" bIns="0" rtlCol="0" anchor="t"/>
           <a:lstStyle/>
           <a:p>
             <a:pPr indent="0" marL="0">
               <a:spcAft>
-                <a:spcPts val="1000"/>
+                <a:spcPts val="1200"/>
               </a:spcAft>
               <a:buNone/>
             </a:pPr>
             <a:r>
-              <a:rPr lang="en-US" sz="2000" dirty="0">
+              <a:rPr lang="en-US" sz="2400" dirty="0">
                 <a:solidFill>
                   <a:srgbClr val="141B26"/>
                 </a:solidFill>
               </a:rPr>
               <a:t>Peppered moths show inherited variation: most are pale and speckled, but some have genes that make them black.</a:t>
             </a:r>
-            <a:endParaRPr lang="en-US" sz="2000" dirty="0"/>
+            <a:endParaRPr lang="en-US" sz="2400" dirty="0"/>
           </a:p>
           <a:p>
             <a:pPr indent="0" marL="0">
               <a:spcAft>
-                <a:spcPts val="1000"/>
+                <a:spcPts val="1200"/>
               </a:spcAft>
               <a:buNone/>
             </a:pPr>
             <a:r>
-              <a:rPr lang="en-US" sz="2000" dirty="0">
+              <a:rPr lang="en-US" sz="2400" dirty="0">
                 <a:solidFill>
                   <a:srgbClr val="141B26"/>
                 </a:solidFill>
               </a:rPr>
               <a:t>1. What causes inherited variation?</a:t>
             </a:r>
-            <a:endParaRPr lang="en-US" sz="2000" dirty="0"/>
+            <a:endParaRPr lang="en-US" sz="2400" dirty="0"/>
           </a:p>
           <a:p>
             <a:pPr indent="0" marL="0">
               <a:spcAft>
-                <a:spcPts val="1000"/>
+                <a:spcPts val="1200"/>
               </a:spcAft>
               <a:buNone/>
             </a:pPr>
             <a:r>
-              <a:rPr lang="en-US" sz="2000" dirty="0">
+              <a:rPr lang="en-US" sz="2400" dirty="0">
                 <a:solidFill>
                   <a:srgbClr val="141B26"/>
                 </a:solidFill>
               </a:rPr>
               <a:t>2. Which form would a bird spot more easily on a pale tree? On a tree blackened by soot?</a:t>
             </a:r>
-            <a:endParaRPr lang="en-US" sz="2000" dirty="0"/>
+            <a:endParaRPr lang="en-US" sz="2400" dirty="0"/>
           </a:p>
           <a:p>
             <a:pPr indent="0" marL="0">
               <a:spcAft>
-                <a:spcPts val="1000"/>
+                <a:spcPts val="1200"/>
               </a:spcAft>
               <a:buNone/>
             </a:pPr>
             <a:r>
-              <a:rPr lang="en-US" sz="2000" dirty="0">
+              <a:rPr lang="en-US" sz="2400" dirty="0">
                 <a:solidFill>
                   <a:srgbClr val="141B26"/>
                 </a:solidFill>
               </a:rPr>
               <a:t>3. What is a species?</a:t>
             </a:r>
-            <a:endParaRPr lang="en-US" sz="2000" dirty="0"/>
+            <a:endParaRPr lang="en-US" sz="2400" dirty="0"/>
           </a:p>
         </p:txBody>
       </p:sp>
@@ -5945,7 +5913,7 @@
         <p:spPr>
           <a:xfrm>
             <a:off x="6858000" y="5212794"/>
-            <a:ext cx="4754880" cy="502920"/>
+            <a:ext cx="4754880" cy="548640"/>
           </a:xfrm>
           <a:prstGeom prst="rect">
             <a:avLst/>
@@ -5961,7 +5929,7 @@
               <a:buNone/>
             </a:pPr>
             <a:r>
-              <a:rPr lang="en-US" sz="1100" dirty="0">
+              <a:rPr lang="en-US" sz="1300" dirty="0">
                 <a:solidFill>
                   <a:srgbClr val="141B26"/>
                 </a:solidFill>
@@ -5971,21 +5939,21 @@
             <a:pPr algn="l" indent="0" marL="0">
               <a:buNone/>
             </a:pPr>
-            <a:endParaRPr lang="en-US" sz="1100" dirty="0"/>
+            <a:endParaRPr lang="en-US" sz="1300" dirty="0"/>
           </a:p>
           <a:p>
             <a:pPr algn="l" indent="0" marL="0">
               <a:buNone/>
             </a:pPr>
             <a:r>
-              <a:rPr lang="en-US" sz="800" dirty="0">
+              <a:rPr lang="en-US" sz="900" dirty="0">
                 <a:solidFill>
                   <a:srgbClr val="5B6574"/>
                 </a:solidFill>
               </a:rPr>
               <a:t>Image: Bennyboymothman, CC BY 2.0, via Wikimedia Commons</a:t>
             </a:r>
-            <a:endParaRPr lang="en-US" sz="1100" dirty="0"/>
+            <a:endParaRPr lang="en-US" sz="1300" dirty="0"/>
           </a:p>
         </p:txBody>
       </p:sp>
@@ -6168,8 +6136,8 @@
         </p:nvSpPr>
         <p:spPr>
           <a:xfrm>
-            <a:off x="548640" y="1325880"/>
-            <a:ext cx="5669280" cy="457200"/>
+            <a:off x="548640" y="1280160"/>
+            <a:ext cx="5486400" cy="411480"/>
           </a:xfrm>
           <a:prstGeom prst="rect">
             <a:avLst/>
@@ -6185,14 +6153,14 @@
               <a:buNone/>
             </a:pPr>
             <a:r>
-              <a:rPr lang="en-US" sz="2000" b="1" dirty="0">
+              <a:rPr lang="en-US" sz="2200" b="1" dirty="0">
                 <a:solidFill>
                   <a:srgbClr val="7B3A8E"/>
                 </a:solidFill>
               </a:rPr>
               <a:t>Today I can ...</a:t>
             </a:r>
-            <a:endParaRPr lang="en-US" sz="2000" dirty="0"/>
+            <a:endParaRPr lang="en-US" sz="2200" dirty="0"/>
           </a:p>
         </p:txBody>
       </p:sp>
@@ -6204,8 +6172,8 @@
         </p:nvSpPr>
         <p:spPr>
           <a:xfrm>
-            <a:off x="594360" y="1947672"/>
-            <a:ext cx="292608" cy="292608"/>
+            <a:off x="594360" y="1810512"/>
+            <a:ext cx="310896" cy="310896"/>
           </a:xfrm>
           <a:prstGeom prst="rect">
             <a:avLst/>
@@ -6229,33 +6197,31 @@
         </p:nvSpPr>
         <p:spPr>
           <a:xfrm>
-            <a:off x="1051560" y="1874520"/>
-            <a:ext cx="5120640" cy="868680"/>
-          </a:xfrm>
-          <a:prstGeom prst="rect">
-            <a:avLst/>
-          </a:prstGeom>
-          <a:noFill/>
-          <a:ln/>
-        </p:spPr>
-        <p:txBody>
-          <a:bodyPr wrap="square" lIns="0" tIns="0" rIns="0" bIns="0" rtlCol="0" anchor="t">
-            <a:normAutofit/>
-          </a:bodyPr>
+            <a:off x="1097280" y="1737360"/>
+            <a:ext cx="10332720" cy="868680"/>
+          </a:xfrm>
+          <a:prstGeom prst="rect">
+            <a:avLst/>
+          </a:prstGeom>
+          <a:noFill/>
+          <a:ln/>
+        </p:spPr>
+        <p:txBody>
+          <a:bodyPr wrap="square" lIns="0" tIns="0" rIns="0" bIns="0" rtlCol="0" anchor="t"/>
           <a:lstStyle/>
           <a:p>
             <a:pPr indent="0" marL="0">
               <a:buNone/>
             </a:pPr>
             <a:r>
-              <a:rPr lang="en-US" sz="1600" dirty="0">
+              <a:rPr lang="en-US" sz="2000" dirty="0">
                 <a:solidFill>
                   <a:srgbClr val="141B26"/>
                 </a:solidFill>
               </a:rPr>
               <a:t>I can explain how natural selection works on inherited variation when the environment changes, using the peppered moth and the Salton Sea tilapia.</a:t>
             </a:r>
-            <a:endParaRPr lang="en-US" sz="1600" dirty="0"/>
+            <a:endParaRPr lang="en-US" sz="2000" dirty="0"/>
           </a:p>
         </p:txBody>
       </p:sp>
@@ -6267,8 +6233,8 @@
         </p:nvSpPr>
         <p:spPr>
           <a:xfrm>
-            <a:off x="594360" y="2907792"/>
-            <a:ext cx="292608" cy="292608"/>
+            <a:off x="594360" y="2679192"/>
+            <a:ext cx="310896" cy="310896"/>
           </a:xfrm>
           <a:prstGeom prst="rect">
             <a:avLst/>
@@ -6292,33 +6258,31 @@
         </p:nvSpPr>
         <p:spPr>
           <a:xfrm>
-            <a:off x="1051560" y="2834640"/>
-            <a:ext cx="5120640" cy="868680"/>
-          </a:xfrm>
-          <a:prstGeom prst="rect">
-            <a:avLst/>
-          </a:prstGeom>
-          <a:noFill/>
-          <a:ln/>
-        </p:spPr>
-        <p:txBody>
-          <a:bodyPr wrap="square" lIns="0" tIns="0" rIns="0" bIns="0" rtlCol="0" anchor="t">
-            <a:normAutofit/>
-          </a:bodyPr>
+            <a:off x="1097280" y="2606040"/>
+            <a:ext cx="10332720" cy="868680"/>
+          </a:xfrm>
+          <a:prstGeom prst="rect">
+            <a:avLst/>
+          </a:prstGeom>
+          <a:noFill/>
+          <a:ln/>
+        </p:spPr>
+        <p:txBody>
+          <a:bodyPr wrap="square" lIns="0" tIns="0" rIns="0" bIns="0" rtlCol="0" anchor="t"/>
           <a:lstStyle/>
           <a:p>
             <a:pPr indent="0" marL="0">
               <a:buNone/>
             </a:pPr>
             <a:r>
-              <a:rPr lang="en-US" sz="1600" dirty="0">
+              <a:rPr lang="en-US" sz="2000" dirty="0">
                 <a:solidFill>
                   <a:srgbClr val="141B26"/>
                 </a:solidFill>
               </a:rPr>
               <a:t>I can describe the theory of evolution by natural selection and explain how natural selection can produce a new species.</a:t>
             </a:r>
-            <a:endParaRPr lang="en-US" sz="1600" dirty="0"/>
+            <a:endParaRPr lang="en-US" sz="2000" dirty="0"/>
           </a:p>
         </p:txBody>
       </p:sp>
@@ -6330,8 +6294,8 @@
         </p:nvSpPr>
         <p:spPr>
           <a:xfrm>
-            <a:off x="6583680" y="1325880"/>
-            <a:ext cx="5029200" cy="457200"/>
+            <a:off x="548640" y="3611880"/>
+            <a:ext cx="5486400" cy="411480"/>
           </a:xfrm>
           <a:prstGeom prst="rect">
             <a:avLst/>
@@ -6347,14 +6311,14 @@
               <a:buNone/>
             </a:pPr>
             <a:r>
-              <a:rPr lang="en-US" sz="2000" b="1" dirty="0">
+              <a:rPr lang="en-US" sz="2200" b="1" dirty="0">
                 <a:solidFill>
                   <a:srgbClr val="7B3A8E"/>
                 </a:solidFill>
               </a:rPr>
               <a:t>Key words today</a:t>
             </a:r>
-            <a:endParaRPr lang="en-US" sz="2000" dirty="0"/>
+            <a:endParaRPr lang="en-US" sz="2200" dirty="0"/>
           </a:p>
         </p:txBody>
       </p:sp>
@@ -6366,360 +6330,295 @@
         </p:nvSpPr>
         <p:spPr>
           <a:xfrm>
-            <a:off x="6583680" y="1874520"/>
-            <a:ext cx="5029200" cy="4023360"/>
-          </a:xfrm>
-          <a:prstGeom prst="rect">
-            <a:avLst/>
-          </a:prstGeom>
-          <a:noFill/>
-          <a:ln/>
-        </p:spPr>
-        <p:txBody>
-          <a:bodyPr wrap="square" lIns="0" tIns="0" rIns="0" bIns="0" rtlCol="0" anchor="t">
-            <a:normAutofit/>
-          </a:bodyPr>
+            <a:off x="548640" y="4069080"/>
+            <a:ext cx="3515258" cy="1920240"/>
+          </a:xfrm>
+          <a:prstGeom prst="rect">
+            <a:avLst/>
+          </a:prstGeom>
+          <a:noFill/>
+          <a:ln/>
+        </p:spPr>
+        <p:txBody>
+          <a:bodyPr wrap="square" lIns="0" tIns="0" rIns="0" bIns="0" rtlCol="0" anchor="t"/>
+          <a:lstStyle/>
+          <a:p>
+            <a:pPr marL="304800" indent="-304800">
+              <a:spcAft>
+                <a:spcPts val="600"/>
+              </a:spcAft>
+              <a:buSzPct val="100000"/>
+              <a:buChar char="•"/>
+            </a:pPr>
+            <a:r>
+              <a:rPr lang="en-US" sz="2100" b="1" dirty="0">
+                <a:solidFill>
+                  <a:srgbClr val="0F2A5F"/>
+                </a:solidFill>
+              </a:rPr>
+              <a:t>natural selection</a:t>
+            </a:r>
+            <a:endParaRPr lang="en-US" sz="2100" dirty="0"/>
+          </a:p>
+          <a:p>
+            <a:pPr marL="304800" indent="-304800">
+              <a:spcAft>
+                <a:spcPts val="600"/>
+              </a:spcAft>
+              <a:buSzPct val="100000"/>
+              <a:buChar char="•"/>
+            </a:pPr>
+            <a:r>
+              <a:rPr lang="en-US" sz="2100" b="1" dirty="0">
+                <a:solidFill>
+                  <a:srgbClr val="0F2A5F"/>
+                </a:solidFill>
+              </a:rPr>
+              <a:t>evolution</a:t>
+            </a:r>
+            <a:endParaRPr lang="en-US" sz="2100" dirty="0"/>
+          </a:p>
+          <a:p>
+            <a:pPr marL="304800" indent="-304800">
+              <a:spcAft>
+                <a:spcPts val="600"/>
+              </a:spcAft>
+              <a:buSzPct val="100000"/>
+              <a:buChar char="•"/>
+            </a:pPr>
+            <a:r>
+              <a:rPr lang="en-US" sz="2100" b="1" dirty="0">
+                <a:solidFill>
+                  <a:srgbClr val="0F2A5F"/>
+                </a:solidFill>
+              </a:rPr>
+              <a:t>inherited variation</a:t>
+            </a:r>
+            <a:endParaRPr lang="en-US" sz="2100" dirty="0"/>
+          </a:p>
+          <a:p>
+            <a:pPr marL="304800" indent="-304800">
+              <a:spcAft>
+                <a:spcPts val="600"/>
+              </a:spcAft>
+              <a:buSzPct val="100000"/>
+              <a:buChar char="•"/>
+            </a:pPr>
+            <a:r>
+              <a:rPr lang="en-US" sz="2100" b="1" dirty="0">
+                <a:solidFill>
+                  <a:srgbClr val="0F2A5F"/>
+                </a:solidFill>
+              </a:rPr>
+              <a:t>gene</a:t>
+            </a:r>
+            <a:endParaRPr lang="en-US" sz="2100" dirty="0"/>
+          </a:p>
+        </p:txBody>
+      </p:sp>
+      <p:sp>
+        <p:nvSpPr>
+          <p:cNvPr id="12" name="Text 10"/>
+          <p:cNvSpPr txBox="1"/>
+          <p:nvPr/>
+        </p:nvSpPr>
+        <p:spPr>
+          <a:xfrm>
+            <a:off x="4338218" y="4069080"/>
+            <a:ext cx="3515258" cy="1920240"/>
+          </a:xfrm>
+          <a:prstGeom prst="rect">
+            <a:avLst/>
+          </a:prstGeom>
+          <a:noFill/>
+          <a:ln/>
+        </p:spPr>
+        <p:txBody>
+          <a:bodyPr wrap="square" lIns="0" tIns="0" rIns="0" bIns="0" rtlCol="0" anchor="t"/>
+          <a:lstStyle/>
+          <a:p>
+            <a:pPr marL="304800" indent="-304800">
+              <a:spcAft>
+                <a:spcPts val="600"/>
+              </a:spcAft>
+              <a:buSzPct val="100000"/>
+              <a:buChar char="•"/>
+            </a:pPr>
+            <a:r>
+              <a:rPr lang="en-US" sz="2100" b="1" dirty="0">
+                <a:solidFill>
+                  <a:srgbClr val="0F2A5F"/>
+                </a:solidFill>
+              </a:rPr>
+              <a:t>reproduce</a:t>
+            </a:r>
+            <a:endParaRPr lang="en-US" sz="2100" dirty="0"/>
+          </a:p>
+          <a:p>
+            <a:pPr marL="304800" indent="-304800">
+              <a:spcAft>
+                <a:spcPts val="600"/>
+              </a:spcAft>
+              <a:buSzPct val="100000"/>
+              <a:buChar char="•"/>
+            </a:pPr>
+            <a:r>
+              <a:rPr lang="en-US" sz="2100" b="1" dirty="0">
+                <a:solidFill>
+                  <a:srgbClr val="0F2A5F"/>
+                </a:solidFill>
+              </a:rPr>
+              <a:t>generation</a:t>
+            </a:r>
+            <a:endParaRPr lang="en-US" sz="2100" dirty="0"/>
+          </a:p>
+          <a:p>
+            <a:pPr marL="304800" indent="-304800">
+              <a:spcAft>
+                <a:spcPts val="600"/>
+              </a:spcAft>
+              <a:buSzPct val="100000"/>
+              <a:buChar char="•"/>
+            </a:pPr>
+            <a:r>
+              <a:rPr lang="en-US" sz="2100" b="1" dirty="0">
+                <a:solidFill>
+                  <a:srgbClr val="0F2A5F"/>
+                </a:solidFill>
+              </a:rPr>
+              <a:t>hypothesis</a:t>
+            </a:r>
+            <a:endParaRPr lang="en-US" sz="2100" dirty="0"/>
+          </a:p>
+          <a:p>
+            <a:pPr marL="304800" indent="-304800">
+              <a:spcAft>
+                <a:spcPts val="600"/>
+              </a:spcAft>
+              <a:buSzPct val="100000"/>
+              <a:buChar char="•"/>
+            </a:pPr>
+            <a:r>
+              <a:rPr lang="en-US" sz="2100" b="1" dirty="0">
+                <a:solidFill>
+                  <a:srgbClr val="0F2A5F"/>
+                </a:solidFill>
+              </a:rPr>
+              <a:t>theory</a:t>
+            </a:r>
+            <a:endParaRPr lang="en-US" sz="2100" dirty="0"/>
+          </a:p>
+        </p:txBody>
+      </p:sp>
+      <p:sp>
+        <p:nvSpPr>
+          <p:cNvPr id="13" name="Text 11"/>
+          <p:cNvSpPr txBox="1"/>
+          <p:nvPr/>
+        </p:nvSpPr>
+        <p:spPr>
+          <a:xfrm>
+            <a:off x="8127797" y="4069080"/>
+            <a:ext cx="3515258" cy="1920240"/>
+          </a:xfrm>
+          <a:prstGeom prst="rect">
+            <a:avLst/>
+          </a:prstGeom>
+          <a:noFill/>
+          <a:ln/>
+        </p:spPr>
+        <p:txBody>
+          <a:bodyPr wrap="square" lIns="0" tIns="0" rIns="0" bIns="0" rtlCol="0" anchor="t"/>
+          <a:lstStyle/>
+          <a:p>
+            <a:pPr marL="304800" indent="-304800">
+              <a:spcAft>
+                <a:spcPts val="600"/>
+              </a:spcAft>
+              <a:buSzPct val="100000"/>
+              <a:buChar char="•"/>
+            </a:pPr>
+            <a:r>
+              <a:rPr lang="en-US" sz="2200" b="1" dirty="0">
+                <a:solidFill>
+                  <a:srgbClr val="0F2A5F"/>
+                </a:solidFill>
+              </a:rPr>
+              <a:t>species</a:t>
+            </a:r>
+            <a:endParaRPr lang="en-US" sz="2200" dirty="0"/>
+          </a:p>
+          <a:p>
+            <a:pPr marL="304800" indent="-304800">
+              <a:spcAft>
+                <a:spcPts val="600"/>
+              </a:spcAft>
+              <a:buSzPct val="100000"/>
+              <a:buChar char="•"/>
+            </a:pPr>
+            <a:r>
+              <a:rPr lang="en-US" sz="2200" b="1" dirty="0">
+                <a:solidFill>
+                  <a:srgbClr val="0F2A5F"/>
+                </a:solidFill>
+              </a:rPr>
+              <a:t>camouflage</a:t>
+            </a:r>
+            <a:endParaRPr lang="en-US" sz="2200" dirty="0"/>
+          </a:p>
+          <a:p>
+            <a:pPr marL="304800" indent="-304800">
+              <a:spcAft>
+                <a:spcPts val="600"/>
+              </a:spcAft>
+              <a:buSzPct val="100000"/>
+              <a:buChar char="•"/>
+            </a:pPr>
+            <a:r>
+              <a:rPr lang="en-US" sz="2200" b="1" dirty="0">
+                <a:solidFill>
+                  <a:srgbClr val="0F2A5F"/>
+                </a:solidFill>
+              </a:rPr>
+              <a:t>cloning</a:t>
+            </a:r>
+            <a:endParaRPr lang="en-US" sz="2200" dirty="0"/>
+          </a:p>
+        </p:txBody>
+      </p:sp>
+      <p:sp>
+        <p:nvSpPr>
+          <p:cNvPr id="14" name="Text 12"/>
+          <p:cNvSpPr txBox="1"/>
+          <p:nvPr/>
+        </p:nvSpPr>
+        <p:spPr>
+          <a:xfrm>
+            <a:off x="548640" y="6035040"/>
+            <a:ext cx="10881360" cy="320040"/>
+          </a:xfrm>
+          <a:prstGeom prst="rect">
+            <a:avLst/>
+          </a:prstGeom>
+          <a:noFill/>
+          <a:ln/>
+        </p:spPr>
+        <p:txBody>
+          <a:bodyPr wrap="square" lIns="0" tIns="0" rIns="0" bIns="0" rtlCol="0" anchor="ctr"/>
           <a:lstStyle/>
           <a:p>
             <a:pPr indent="0" marL="0">
-              <a:spcAft>
-                <a:spcPts val="500"/>
-              </a:spcAft>
-              <a:buNone/>
-            </a:pPr>
-            <a:r>
-              <a:rPr lang="en-US" sz="1300" b="1" dirty="0">
-                <a:solidFill>
-                  <a:srgbClr val="0F2A5F"/>
-                </a:solidFill>
-              </a:rPr>
-              <a:t>natural selection</a:t>
-            </a:r>
-            <a:pPr indent="0" marL="0">
-              <a:spcAft>
-                <a:spcPts val="500"/>
-              </a:spcAft>
-              <a:buNone/>
-            </a:pPr>
-            <a:r>
-              <a:rPr lang="en-US" sz="1300" dirty="0">
-                <a:solidFill>
-                  <a:srgbClr val="141B26"/>
-                </a:solidFill>
-              </a:rPr>
-              <a:t>  organisms better adapted to their environment are more likely to survive, reproduce and pass on their genes</a:t>
-            </a:r>
-            <a:endParaRPr lang="en-US" sz="1300" dirty="0"/>
-          </a:p>
-          <a:p>
-            <a:pPr indent="0" marL="0">
-              <a:spcAft>
-                <a:spcPts val="500"/>
-              </a:spcAft>
-              <a:buNone/>
-            </a:pPr>
-            <a:r>
-              <a:rPr lang="en-US" sz="1300" b="1" dirty="0">
-                <a:solidFill>
-                  <a:srgbClr val="0F2A5F"/>
-                </a:solidFill>
-              </a:rPr>
-              <a:t>evolution</a:t>
-            </a:r>
-            <a:pPr indent="0" marL="0">
-              <a:spcAft>
-                <a:spcPts val="500"/>
-              </a:spcAft>
-              <a:buNone/>
-            </a:pPr>
-            <a:r>
-              <a:rPr lang="en-US" sz="1300" dirty="0">
-                <a:solidFill>
-                  <a:srgbClr val="141B26"/>
-                </a:solidFill>
-              </a:rPr>
-              <a:t>  a change over time in the characteristics of organisms, sometimes making a new species</a:t>
-            </a:r>
-            <a:endParaRPr lang="en-US" sz="1300" dirty="0"/>
-          </a:p>
-          <a:p>
-            <a:pPr indent="0" marL="0">
-              <a:spcAft>
-                <a:spcPts val="500"/>
-              </a:spcAft>
-              <a:buNone/>
-            </a:pPr>
-            <a:r>
-              <a:rPr lang="en-US" sz="1300" b="1" dirty="0">
-                <a:solidFill>
-                  <a:srgbClr val="0F2A5F"/>
-                </a:solidFill>
-              </a:rPr>
-              <a:t>inherited variation</a:t>
-            </a:r>
-            <a:pPr indent="0" marL="0">
-              <a:spcAft>
-                <a:spcPts val="500"/>
-              </a:spcAft>
-              <a:buNone/>
-            </a:pPr>
-            <a:r>
-              <a:rPr lang="en-US" sz="1300" dirty="0">
-                <a:solidFill>
-                  <a:srgbClr val="141B26"/>
-                </a:solidFill>
-              </a:rPr>
-              <a:t>  differences between individuals caused by genes, passed on to offspring</a:t>
-            </a:r>
-            <a:endParaRPr lang="en-US" sz="1300" dirty="0"/>
-          </a:p>
-          <a:p>
-            <a:pPr indent="0" marL="0">
-              <a:spcAft>
-                <a:spcPts val="500"/>
-              </a:spcAft>
-              <a:buNone/>
-            </a:pPr>
-            <a:r>
-              <a:rPr lang="en-US" sz="1300" b="1" dirty="0">
-                <a:solidFill>
-                  <a:srgbClr val="0F2A5F"/>
-                </a:solidFill>
-              </a:rPr>
-              <a:t>gene</a:t>
-            </a:r>
-            <a:pPr indent="0" marL="0">
-              <a:spcAft>
-                <a:spcPts val="500"/>
-              </a:spcAft>
-              <a:buNone/>
-            </a:pPr>
-            <a:r>
-              <a:rPr lang="en-US" sz="1300" dirty="0">
-                <a:solidFill>
-                  <a:srgbClr val="141B26"/>
-                </a:solidFill>
-              </a:rPr>
-              <a:t>  a section of DNA that carries the instructions for one characteristic</a:t>
-            </a:r>
-            <a:endParaRPr lang="en-US" sz="1300" dirty="0"/>
-          </a:p>
-          <a:p>
-            <a:pPr indent="0" marL="0">
-              <a:spcAft>
-                <a:spcPts val="500"/>
-              </a:spcAft>
-              <a:buNone/>
-            </a:pPr>
-            <a:r>
-              <a:rPr lang="en-US" sz="1300" b="1" dirty="0">
-                <a:solidFill>
-                  <a:srgbClr val="0F2A5F"/>
-                </a:solidFill>
-              </a:rPr>
-              <a:t>reproduce</a:t>
-            </a:r>
-            <a:pPr indent="0" marL="0">
-              <a:spcAft>
-                <a:spcPts val="500"/>
-              </a:spcAft>
-              <a:buNone/>
-            </a:pPr>
-            <a:r>
-              <a:rPr lang="en-US" sz="1300" dirty="0">
-                <a:solidFill>
-                  <a:srgbClr val="141B26"/>
-                </a:solidFill>
-              </a:rPr>
-              <a:t>  to produce offspring</a:t>
-            </a:r>
-            <a:endParaRPr lang="en-US" sz="1300" dirty="0"/>
-          </a:p>
-          <a:p>
-            <a:pPr indent="0" marL="0">
-              <a:spcAft>
-                <a:spcPts val="500"/>
-              </a:spcAft>
-              <a:buNone/>
-            </a:pPr>
-            <a:r>
-              <a:rPr lang="en-US" sz="1300" b="1" dirty="0">
-                <a:solidFill>
-                  <a:srgbClr val="0F2A5F"/>
-                </a:solidFill>
-              </a:rPr>
-              <a:t>generation</a:t>
-            </a:r>
-            <a:pPr indent="0" marL="0">
-              <a:spcAft>
-                <a:spcPts val="500"/>
-              </a:spcAft>
-              <a:buNone/>
-            </a:pPr>
-            <a:r>
-              <a:rPr lang="en-US" sz="1300" dirty="0">
-                <a:solidFill>
-                  <a:srgbClr val="141B26"/>
-                </a:solidFill>
-              </a:rPr>
-              <a:t>  all the offspring born at about the same time; parents, children and grandchildren are three generations</a:t>
-            </a:r>
-            <a:endParaRPr lang="en-US" sz="1300" dirty="0"/>
-          </a:p>
-          <a:p>
-            <a:pPr indent="0" marL="0">
-              <a:spcAft>
-                <a:spcPts val="500"/>
-              </a:spcAft>
-              <a:buNone/>
-            </a:pPr>
-            <a:r>
-              <a:rPr lang="en-US" sz="1300" b="1" dirty="0">
-                <a:solidFill>
-                  <a:srgbClr val="0F2A5F"/>
-                </a:solidFill>
-              </a:rPr>
-              <a:t>hypothesis</a:t>
-            </a:r>
-            <a:pPr indent="0" marL="0">
-              <a:spcAft>
-                <a:spcPts val="500"/>
-              </a:spcAft>
-              <a:buNone/>
-            </a:pPr>
-            <a:r>
-              <a:rPr lang="en-US" sz="1300" dirty="0">
-                <a:solidFill>
-                  <a:srgbClr val="141B26"/>
-                </a:solidFill>
-              </a:rPr>
-              <a:t>  an idea, based on observations, that can be tested</a:t>
-            </a:r>
-            <a:endParaRPr lang="en-US" sz="1300" dirty="0"/>
-          </a:p>
-          <a:p>
-            <a:pPr indent="0" marL="0">
-              <a:spcAft>
-                <a:spcPts val="500"/>
-              </a:spcAft>
-              <a:buNone/>
-            </a:pPr>
-            <a:r>
-              <a:rPr lang="en-US" sz="1300" b="1" dirty="0">
-                <a:solidFill>
-                  <a:srgbClr val="0F2A5F"/>
-                </a:solidFill>
-              </a:rPr>
-              <a:t>theory</a:t>
-            </a:r>
-            <a:pPr indent="0" marL="0">
-              <a:spcAft>
-                <a:spcPts val="500"/>
-              </a:spcAft>
-              <a:buNone/>
-            </a:pPr>
-            <a:r>
-              <a:rPr lang="en-US" sz="1300" dirty="0">
-                <a:solidFill>
-                  <a:srgbClr val="141B26"/>
-                </a:solidFill>
-              </a:rPr>
-              <a:t>  an explanation that has been tested many times and is accepted by scientists</a:t>
-            </a:r>
-            <a:endParaRPr lang="en-US" sz="1300" dirty="0"/>
-          </a:p>
-          <a:p>
-            <a:pPr indent="0" marL="0">
-              <a:spcAft>
-                <a:spcPts val="500"/>
-              </a:spcAft>
-              <a:buNone/>
-            </a:pPr>
-            <a:r>
-              <a:rPr lang="en-US" sz="1300" b="1" dirty="0">
-                <a:solidFill>
-                  <a:srgbClr val="0F2A5F"/>
-                </a:solidFill>
-              </a:rPr>
-              <a:t>species</a:t>
-            </a:r>
-            <a:pPr indent="0" marL="0">
-              <a:spcAft>
-                <a:spcPts val="500"/>
-              </a:spcAft>
-              <a:buNone/>
-            </a:pPr>
-            <a:r>
-              <a:rPr lang="en-US" sz="1300" dirty="0">
-                <a:solidFill>
-                  <a:srgbClr val="141B26"/>
-                </a:solidFill>
-              </a:rPr>
-              <a:t>  a group of organisms that can breed together to produce offspring that can also breed</a:t>
-            </a:r>
-            <a:endParaRPr lang="en-US" sz="1300" dirty="0"/>
-          </a:p>
-          <a:p>
-            <a:pPr indent="0" marL="0">
-              <a:spcAft>
-                <a:spcPts val="500"/>
-              </a:spcAft>
-              <a:buNone/>
-            </a:pPr>
-            <a:r>
-              <a:rPr lang="en-US" sz="1300" b="1" dirty="0">
-                <a:solidFill>
-                  <a:srgbClr val="0F2A5F"/>
-                </a:solidFill>
-              </a:rPr>
-              <a:t>camouflage</a:t>
-            </a:r>
-            <a:pPr indent="0" marL="0">
-              <a:spcAft>
-                <a:spcPts val="500"/>
-              </a:spcAft>
-              <a:buNone/>
-            </a:pPr>
-            <a:r>
-              <a:rPr lang="en-US" sz="1300" dirty="0">
-                <a:solidFill>
-                  <a:srgbClr val="141B26"/>
-                </a:solidFill>
-              </a:rPr>
-              <a:t>  colours or patterns that make an organism hard to see</a:t>
-            </a:r>
-            <a:endParaRPr lang="en-US" sz="1300" dirty="0"/>
-          </a:p>
-          <a:p>
-            <a:pPr indent="0" marL="0">
-              <a:spcAft>
-                <a:spcPts val="500"/>
-              </a:spcAft>
-              <a:buNone/>
-            </a:pPr>
-            <a:r>
-              <a:rPr lang="en-US" sz="1300" b="1" dirty="0">
-                <a:solidFill>
-                  <a:srgbClr val="0F2A5F"/>
-                </a:solidFill>
-              </a:rPr>
-              <a:t>cloning</a:t>
-            </a:r>
-            <a:pPr indent="0" marL="0">
-              <a:spcAft>
-                <a:spcPts val="500"/>
-              </a:spcAft>
-              <a:buNone/>
-            </a:pPr>
-            <a:r>
-              <a:rPr lang="en-US" sz="1300" dirty="0">
-                <a:solidFill>
-                  <a:srgbClr val="141B26"/>
-                </a:solidFill>
-              </a:rPr>
-              <a:t>  making a new organism with exactly the same genetic information as another</a:t>
-            </a:r>
-            <a:endParaRPr lang="en-US" sz="1300" dirty="0"/>
+              <a:buNone/>
+            </a:pPr>
+            <a:r>
+              <a:rPr lang="en-US" sz="1400" i="1" dirty="0">
+                <a:solidFill>
+                  <a:srgbClr val="5B6574"/>
+                </a:solidFill>
+              </a:rPr>
+              <a:t>Meanings are in the key words box on your worksheet.</a:t>
+            </a:r>
+            <a:endParaRPr lang="en-US" sz="1400" dirty="0"/>
           </a:p>
         </p:txBody>
       </p:sp>
@@ -6903,32 +6802,30 @@
         <p:spPr>
           <a:xfrm>
             <a:off x="548640" y="1371600"/>
-            <a:ext cx="5394960" cy="2377440"/>
-          </a:xfrm>
-          <a:prstGeom prst="rect">
-            <a:avLst/>
-          </a:prstGeom>
-          <a:noFill/>
-          <a:ln/>
-        </p:spPr>
-        <p:txBody>
-          <a:bodyPr wrap="square" lIns="0" tIns="0" rIns="0" bIns="0" rtlCol="0" anchor="t">
-            <a:normAutofit/>
-          </a:bodyPr>
+            <a:ext cx="5394960" cy="2651760"/>
+          </a:xfrm>
+          <a:prstGeom prst="rect">
+            <a:avLst/>
+          </a:prstGeom>
+          <a:noFill/>
+          <a:ln/>
+        </p:spPr>
+        <p:txBody>
+          <a:bodyPr wrap="square" lIns="0" tIns="0" rIns="0" bIns="0" rtlCol="0" anchor="t"/>
           <a:lstStyle/>
           <a:p>
             <a:pPr indent="0" marL="0">
               <a:buNone/>
             </a:pPr>
             <a:r>
-              <a:rPr lang="en-US" sz="2800" b="1" dirty="0">
+              <a:rPr lang="en-US" sz="2900" b="1" dirty="0">
                 <a:solidFill>
                   <a:srgbClr val="0F2A5F"/>
                 </a:solidFill>
               </a:rPr>
               <a:t>In the 1850s most peppered moths around Manchester were pale. By 1895, 98% of them were black. Many factories had been built in those years. What happened?</a:t>
             </a:r>
-            <a:endParaRPr lang="en-US" sz="2800" dirty="0"/>
+            <a:endParaRPr lang="en-US" sz="2900" dirty="0"/>
           </a:p>
         </p:txBody>
       </p:sp>
@@ -6940,19 +6837,17 @@
         </p:nvSpPr>
         <p:spPr>
           <a:xfrm>
-            <a:off x="548640" y="3794760"/>
-            <a:ext cx="5394960" cy="2103120"/>
-          </a:xfrm>
-          <a:prstGeom prst="rect">
-            <a:avLst/>
-          </a:prstGeom>
-          <a:noFill/>
-          <a:ln/>
-        </p:spPr>
-        <p:txBody>
-          <a:bodyPr wrap="square" lIns="0" tIns="0" rIns="0" bIns="0" rtlCol="0" anchor="t">
-            <a:normAutofit/>
-          </a:bodyPr>
+            <a:off x="548640" y="4114800"/>
+            <a:ext cx="5394960" cy="1828800"/>
+          </a:xfrm>
+          <a:prstGeom prst="rect">
+            <a:avLst/>
+          </a:prstGeom>
+          <a:noFill/>
+          <a:ln/>
+        </p:spPr>
+        <p:txBody>
+          <a:bodyPr wrap="square" lIns="0" tIns="0" rIns="0" bIns="0" rtlCol="0" anchor="t"/>
           <a:lstStyle/>
           <a:p>
             <a:pPr indent="0" marL="0">
@@ -6962,14 +6857,14 @@
               <a:buNone/>
             </a:pPr>
             <a:r>
-              <a:rPr lang="en-US" sz="1600" dirty="0">
+              <a:rPr lang="en-US" sz="2000" dirty="0">
                 <a:solidFill>
                   <a:srgbClr val="141B26"/>
                 </a:solidFill>
               </a:rPr>
               <a:t>Talk to a partner: what did the factories change, and who eats moths?</a:t>
             </a:r>
-            <a:endParaRPr lang="en-US" sz="1600" dirty="0"/>
+            <a:endParaRPr lang="en-US" sz="2000" dirty="0"/>
           </a:p>
         </p:txBody>
       </p:sp>
@@ -7006,7 +6901,7 @@
         <p:spPr>
           <a:xfrm>
             <a:off x="6309360" y="5196209"/>
-            <a:ext cx="5303520" cy="502920"/>
+            <a:ext cx="5303520" cy="548640"/>
           </a:xfrm>
           <a:prstGeom prst="rect">
             <a:avLst/>
@@ -7022,7 +6917,7 @@
               <a:buNone/>
             </a:pPr>
             <a:r>
-              <a:rPr lang="en-US" sz="1100" dirty="0">
+              <a:rPr lang="en-US" sz="1300" dirty="0">
                 <a:solidFill>
                   <a:srgbClr val="141B26"/>
                 </a:solidFill>
@@ -7032,21 +6927,21 @@
             <a:pPr algn="l" indent="0" marL="0">
               <a:buNone/>
             </a:pPr>
-            <a:endParaRPr lang="en-US" sz="1100" dirty="0"/>
+            <a:endParaRPr lang="en-US" sz="1300" dirty="0"/>
           </a:p>
           <a:p>
             <a:pPr algn="l" indent="0" marL="0">
               <a:buNone/>
             </a:pPr>
             <a:r>
-              <a:rPr lang="en-US" sz="800" dirty="0">
+              <a:rPr lang="en-US" sz="900" dirty="0">
                 <a:solidFill>
                   <a:srgbClr val="5B6574"/>
                 </a:solidFill>
               </a:rPr>
               <a:t>Image: Thierry Arbault, CC BY 4.0, via Wikimedia Commons</a:t>
             </a:r>
-            <a:endParaRPr lang="en-US" sz="1100" dirty="0"/>
+            <a:endParaRPr lang="en-US" sz="1300" dirty="0"/>
           </a:p>
         </p:txBody>
       </p:sp>
@@ -7229,8 +7124,8 @@
         </p:nvSpPr>
         <p:spPr>
           <a:xfrm>
-            <a:off x="548640" y="6053328"/>
-            <a:ext cx="9601200" cy="292608"/>
+            <a:off x="548640" y="6035040"/>
+            <a:ext cx="9601200" cy="310896"/>
           </a:xfrm>
           <a:prstGeom prst="rect">
             <a:avLst/>
@@ -7246,7 +7141,7 @@
               <a:buNone/>
             </a:pPr>
             <a:r>
-              <a:rPr lang="en-US" sz="1200" b="1" dirty="0">
+              <a:rPr lang="en-US" sz="1400" b="1" dirty="0">
                 <a:solidFill>
                   <a:srgbClr val="7B3A8E"/>
                 </a:solidFill>
@@ -7257,14 +7152,14 @@
               <a:buNone/>
             </a:pPr>
             <a:r>
-              <a:rPr lang="en-US" sz="1200" dirty="0">
+              <a:rPr lang="en-US" sz="1400" dirty="0">
                 <a:solidFill>
                   <a:srgbClr val="7B3A8E"/>
                 </a:solidFill>
               </a:rPr>
               <a:t>natural selection   ·   inherited variation   ·   gene   ·   reproduce   ·   generation</a:t>
             </a:r>
-            <a:endParaRPr lang="en-US" sz="1200" dirty="0"/>
+            <a:endParaRPr lang="en-US" sz="1400" dirty="0"/>
           </a:p>
         </p:txBody>
       </p:sp>
@@ -7286,81 +7181,79 @@
           <a:ln/>
         </p:spPr>
         <p:txBody>
-          <a:bodyPr wrap="square" lIns="0" tIns="0" rIns="0" bIns="0" rtlCol="0" anchor="t">
-            <a:normAutofit/>
-          </a:bodyPr>
-          <a:lstStyle/>
-          <a:p>
-            <a:pPr marL="228600" indent="-228600">
+          <a:bodyPr wrap="square" lIns="0" tIns="0" rIns="0" bIns="0" rtlCol="0" anchor="t"/>
+          <a:lstStyle/>
+          <a:p>
+            <a:pPr marL="304800" indent="-304800">
               <a:spcAft>
-                <a:spcPts val="600"/>
+                <a:spcPts val="800"/>
               </a:spcAft>
               <a:buSzPct val="100000"/>
               <a:buChar char="•"/>
             </a:pPr>
             <a:r>
-              <a:rPr lang="en-US" sz="1600" dirty="0">
+              <a:rPr lang="en-US" sz="2000" dirty="0">
                 <a:solidFill>
                   <a:srgbClr val="141B26"/>
                 </a:solidFill>
               </a:rPr>
               <a:t>Variation: a few moths had genes that made them black.</a:t>
             </a:r>
-            <a:endParaRPr lang="en-US" sz="1700" dirty="0"/>
-          </a:p>
-          <a:p>
-            <a:pPr marL="228600" indent="-228600">
+            <a:endParaRPr lang="en-US" sz="2000" dirty="0"/>
+          </a:p>
+          <a:p>
+            <a:pPr marL="304800" indent="-304800">
               <a:spcAft>
-                <a:spcPts val="600"/>
+                <a:spcPts val="800"/>
               </a:spcAft>
               <a:buSzPct val="100000"/>
               <a:buChar char="•"/>
             </a:pPr>
             <a:r>
-              <a:rPr lang="en-US" sz="1600" dirty="0">
+              <a:rPr lang="en-US" sz="2000" dirty="0">
                 <a:solidFill>
                   <a:srgbClr val="141B26"/>
                 </a:solidFill>
               </a:rPr>
               <a:t>The environment changed: soot made the trees black.</a:t>
             </a:r>
-            <a:endParaRPr lang="en-US" sz="1700" dirty="0"/>
-          </a:p>
-          <a:p>
-            <a:pPr marL="228600" indent="-228600">
+            <a:endParaRPr lang="en-US" sz="2000" dirty="0"/>
+          </a:p>
+          <a:p>
+            <a:pPr marL="304800" indent="-304800">
               <a:spcAft>
-                <a:spcPts val="600"/>
+                <a:spcPts val="800"/>
               </a:spcAft>
               <a:buSzPct val="100000"/>
               <a:buChar char="•"/>
             </a:pPr>
             <a:r>
-              <a:rPr lang="en-US" sz="1600" dirty="0">
+              <a:rPr lang="en-US" sz="2000" dirty="0">
                 <a:solidFill>
                   <a:srgbClr val="141B26"/>
                 </a:solidFill>
               </a:rPr>
               <a:t>Birds spotted and ate more pale moths. More black moths survived and reproduced, passing on their genes.</a:t>
             </a:r>
-            <a:endParaRPr lang="en-US" sz="1700" dirty="0"/>
-          </a:p>
-          <a:p>
-            <a:pPr marL="228600" indent="-228600">
+            <a:endParaRPr lang="en-US" sz="2000" dirty="0"/>
+          </a:p>
+          <a:p>
+            <a:pPr marL="304800" indent="-304800">
               <a:spcAft>
-                <a:spcPts val="600"/>
+                <a:spcPts val="800"/>
               </a:spcAft>
               <a:buSzPct val="100000"/>
               <a:buChar char="•"/>
             </a:pPr>
             <a:r>
-              <a:rPr lang="en-US" sz="1600" dirty="0">
+              <a:rPr lang="en-US" sz="2000" dirty="0">
                 <a:solidFill>
                   <a:srgbClr val="141B26"/>
                 </a:solidFill>
               </a:rPr>
               <a:t>Each generation had more black moths. The environment 'selected' the black variation.</a:t>
             </a:r>
-            <a:endParaRPr lang="en-US" sz="1700" dirty="0"/>
+            <a:endParaRPr lang="en-US" sz="2000" dirty="0"/>
           </a:p>
         </p:txBody>
       </p:sp>
@@ -7431,16 +7324,14 @@
           <a:ln/>
         </p:spPr>
         <p:txBody>
-          <a:bodyPr wrap="square" lIns="0" tIns="0" rIns="0" bIns="0" rtlCol="0" anchor="ctr">
-            <a:normAutofit/>
-          </a:bodyPr>
+          <a:bodyPr wrap="square" lIns="0" tIns="0" rIns="0" bIns="0" rtlCol="0" anchor="ctr"/>
           <a:lstStyle/>
           <a:p>
             <a:pPr indent="0" marL="0">
               <a:buNone/>
             </a:pPr>
             <a:r>
-              <a:rPr lang="en-US" sz="1400" b="1" dirty="0">
+              <a:rPr lang="en-US" sz="1700" b="1" dirty="0">
                 <a:solidFill>
                   <a:srgbClr val="7B3A8E"/>
                 </a:solidFill>
@@ -7451,14 +7342,14 @@
               <a:buNone/>
             </a:pPr>
             <a:r>
-              <a:rPr lang="en-US" sz="1400" dirty="0">
+              <a:rPr lang="en-US" sz="1700" dirty="0">
                 <a:solidFill>
                   <a:srgbClr val="141B26"/>
                 </a:solidFill>
               </a:rPr>
               <a:t>Natural selection: the environment selects the inherited variations that survive and are passed on.</a:t>
             </a:r>
-            <a:endParaRPr lang="en-US" sz="1400" dirty="0"/>
+            <a:endParaRPr lang="en-US" sz="1700" dirty="0"/>
           </a:p>
         </p:txBody>
       </p:sp>
@@ -7641,8 +7532,8 @@
         </p:nvSpPr>
         <p:spPr>
           <a:xfrm>
-            <a:off x="548640" y="6053328"/>
-            <a:ext cx="9601200" cy="292608"/>
+            <a:off x="548640" y="6035040"/>
+            <a:ext cx="9601200" cy="310896"/>
           </a:xfrm>
           <a:prstGeom prst="rect">
             <a:avLst/>
@@ -7658,7 +7549,7 @@
               <a:buNone/>
             </a:pPr>
             <a:r>
-              <a:rPr lang="en-US" sz="1200" b="1" dirty="0">
+              <a:rPr lang="en-US" sz="1400" b="1" dirty="0">
                 <a:solidFill>
                   <a:srgbClr val="7B3A8E"/>
                 </a:solidFill>
@@ -7669,14 +7560,14 @@
               <a:buNone/>
             </a:pPr>
             <a:r>
-              <a:rPr lang="en-US" sz="1200" dirty="0">
+              <a:rPr lang="en-US" sz="1400" dirty="0">
                 <a:solidFill>
                   <a:srgbClr val="7B3A8E"/>
                 </a:solidFill>
               </a:rPr>
               <a:t>natural selection   ·   generation   ·   inherited variation</a:t>
             </a:r>
-            <a:endParaRPr lang="en-US" sz="1200" dirty="0"/>
+            <a:endParaRPr lang="en-US" sz="1400" dirty="0"/>
           </a:p>
         </p:txBody>
       </p:sp>
@@ -7698,81 +7589,79 @@
           <a:ln/>
         </p:spPr>
         <p:txBody>
-          <a:bodyPr wrap="square" lIns="0" tIns="0" rIns="0" bIns="0" rtlCol="0" anchor="t">
-            <a:normAutofit/>
-          </a:bodyPr>
-          <a:lstStyle/>
-          <a:p>
-            <a:pPr marL="228600" indent="-228600">
+          <a:bodyPr wrap="square" lIns="0" tIns="0" rIns="0" bIns="0" rtlCol="0" anchor="t"/>
+          <a:lstStyle/>
+          <a:p>
+            <a:pPr marL="304800" indent="-304800">
               <a:spcAft>
-                <a:spcPts val="600"/>
+                <a:spcPts val="800"/>
               </a:spcAft>
               <a:buSzPct val="100000"/>
               <a:buChar char="•"/>
             </a:pPr>
             <a:r>
-              <a:rPr lang="en-US" sz="1600" dirty="0">
+              <a:rPr lang="en-US" sz="1800" dirty="0">
                 <a:solidFill>
                   <a:srgbClr val="141B26"/>
                 </a:solidFill>
               </a:rPr>
               <a:t>The Salton Sea in California formed in 1905 and slowly became 25% saltier than the Pacific Ocean. Most fish species died out.</a:t>
             </a:r>
-            <a:endParaRPr lang="en-US" sz="1700" dirty="0"/>
-          </a:p>
-          <a:p>
-            <a:pPr marL="228600" indent="-228600">
+            <a:endParaRPr lang="en-US" sz="1800" dirty="0"/>
+          </a:p>
+          <a:p>
+            <a:pPr marL="304800" indent="-304800">
               <a:spcAft>
-                <a:spcPts val="600"/>
+                <a:spcPts val="800"/>
               </a:spcAft>
               <a:buSzPct val="100000"/>
               <a:buChar char="•"/>
             </a:pPr>
             <a:r>
-              <a:rPr lang="en-US" sz="1600" dirty="0">
+              <a:rPr lang="en-US" sz="1800" dirty="0">
                 <a:solidFill>
                   <a:srgbClr val="141B26"/>
                 </a:solidFill>
               </a:rPr>
               <a:t>By chance, some tilapia had genetic variations that helped them cope with salt.</a:t>
             </a:r>
-            <a:endParaRPr lang="en-US" sz="1700" dirty="0"/>
-          </a:p>
-          <a:p>
-            <a:pPr marL="228600" indent="-228600">
+            <a:endParaRPr lang="en-US" sz="1800" dirty="0"/>
+          </a:p>
+          <a:p>
+            <a:pPr marL="304800" indent="-304800">
               <a:spcAft>
-                <a:spcPts val="600"/>
+                <a:spcPts val="800"/>
               </a:spcAft>
               <a:buSzPct val="100000"/>
               <a:buChar char="•"/>
             </a:pPr>
             <a:r>
-              <a:rPr lang="en-US" sz="1600" dirty="0">
+              <a:rPr lang="en-US" sz="1800" dirty="0">
                 <a:solidFill>
                   <a:srgbClr val="141B26"/>
                 </a:solidFill>
               </a:rPr>
               <a:t>More of these fish survived and reproduced, so the next generation had more salt-tolerant fish.</a:t>
             </a:r>
-            <a:endParaRPr lang="en-US" sz="1700" dirty="0"/>
-          </a:p>
-          <a:p>
-            <a:pPr marL="228600" indent="-228600">
+            <a:endParaRPr lang="en-US" sz="1800" dirty="0"/>
+          </a:p>
+          <a:p>
+            <a:pPr marL="304800" indent="-304800">
               <a:spcAft>
-                <a:spcPts val="600"/>
+                <a:spcPts val="800"/>
               </a:spcAft>
               <a:buSzPct val="100000"/>
               <a:buChar char="•"/>
             </a:pPr>
             <a:r>
-              <a:rPr lang="en-US" sz="1600" dirty="0">
+              <a:rPr lang="en-US" sz="1800" dirty="0">
                 <a:solidFill>
                   <a:srgbClr val="141B26"/>
                 </a:solidFill>
               </a:rPr>
               <a:t>This repeated as the sea got saltier. Today all Salton Sea tilapia cope with very salty water.</a:t>
             </a:r>
-            <a:endParaRPr lang="en-US" sz="1700" dirty="0"/>
+            <a:endParaRPr lang="en-US" sz="1800" dirty="0"/>
           </a:p>
         </p:txBody>
       </p:sp>
@@ -7843,16 +7732,14 @@
           <a:ln/>
         </p:spPr>
         <p:txBody>
-          <a:bodyPr wrap="square" lIns="0" tIns="0" rIns="0" bIns="0" rtlCol="0" anchor="ctr">
-            <a:normAutofit/>
-          </a:bodyPr>
+          <a:bodyPr wrap="square" lIns="0" tIns="0" rIns="0" bIns="0" rtlCol="0" anchor="ctr"/>
           <a:lstStyle/>
           <a:p>
             <a:pPr indent="0" marL="0">
               <a:buNone/>
             </a:pPr>
             <a:r>
-              <a:rPr lang="en-US" sz="1400" b="1" dirty="0">
+              <a:rPr lang="en-US" sz="1700" b="1" dirty="0">
                 <a:solidFill>
                   <a:srgbClr val="7B3A8E"/>
                 </a:solidFill>
@@ -7863,14 +7750,14 @@
               <a:buNone/>
             </a:pPr>
             <a:r>
-              <a:rPr lang="en-US" sz="1400" dirty="0">
+              <a:rPr lang="en-US" sz="1700" dirty="0">
                 <a:solidFill>
                   <a:srgbClr val="141B26"/>
                 </a:solidFill>
               </a:rPr>
               <a:t>Environmental change happens over and over; natural selection shifts the whole population, generation by generation.</a:t>
             </a:r>
-            <a:endParaRPr lang="en-US" sz="1400" dirty="0"/>
+            <a:endParaRPr lang="en-US" sz="1700" dirty="0"/>
           </a:p>
         </p:txBody>
       </p:sp>
@@ -8053,8 +7940,8 @@
         </p:nvSpPr>
         <p:spPr>
           <a:xfrm>
-            <a:off x="548640" y="6053328"/>
-            <a:ext cx="9601200" cy="292608"/>
+            <a:off x="548640" y="6035040"/>
+            <a:ext cx="9601200" cy="310896"/>
           </a:xfrm>
           <a:prstGeom prst="rect">
             <a:avLst/>
@@ -8070,7 +7957,7 @@
               <a:buNone/>
             </a:pPr>
             <a:r>
-              <a:rPr lang="en-US" sz="1200" b="1" dirty="0">
+              <a:rPr lang="en-US" sz="1400" b="1" dirty="0">
                 <a:solidFill>
                   <a:srgbClr val="7B3A8E"/>
                 </a:solidFill>
@@ -8081,14 +7968,14 @@
               <a:buNone/>
             </a:pPr>
             <a:r>
-              <a:rPr lang="en-US" sz="1200" dirty="0">
+              <a:rPr lang="en-US" sz="1400" dirty="0">
                 <a:solidFill>
                   <a:srgbClr val="7B3A8E"/>
                 </a:solidFill>
               </a:rPr>
               <a:t>evolution   ·   hypothesis   ·   theory   ·   species</a:t>
             </a:r>
-            <a:endParaRPr lang="en-US" sz="1200" dirty="0"/>
+            <a:endParaRPr lang="en-US" sz="1400" dirty="0"/>
           </a:p>
         </p:txBody>
       </p:sp>
@@ -8110,81 +7997,79 @@
           <a:ln/>
         </p:spPr>
         <p:txBody>
-          <a:bodyPr wrap="square" lIns="0" tIns="0" rIns="0" bIns="0" rtlCol="0" anchor="t">
-            <a:normAutofit/>
-          </a:bodyPr>
-          <a:lstStyle/>
-          <a:p>
-            <a:pPr marL="228600" indent="-228600">
+          <a:bodyPr wrap="square" lIns="0" tIns="0" rIns="0" bIns="0" rtlCol="0" anchor="t"/>
+          <a:lstStyle/>
+          <a:p>
+            <a:pPr marL="304800" indent="-304800">
               <a:spcAft>
-                <a:spcPts val="600"/>
+                <a:spcPts val="800"/>
               </a:spcAft>
               <a:buSzPct val="100000"/>
               <a:buChar char="•"/>
             </a:pPr>
             <a:r>
-              <a:rPr lang="en-US" sz="1700" dirty="0">
+              <a:rPr lang="en-US" sz="1900" dirty="0">
                 <a:solidFill>
                   <a:srgbClr val="141B26"/>
                 </a:solidFill>
               </a:rPr>
               <a:t>Evolution is a change over time in the characteristics of organisms.</a:t>
             </a:r>
-            <a:endParaRPr lang="en-US" sz="1700" dirty="0"/>
-          </a:p>
-          <a:p>
-            <a:pPr marL="228600" indent="-228600">
+            <a:endParaRPr lang="en-US" sz="1900" dirty="0"/>
+          </a:p>
+          <a:p>
+            <a:pPr marL="304800" indent="-304800">
               <a:spcAft>
-                <a:spcPts val="600"/>
+                <a:spcPts val="800"/>
               </a:spcAft>
               <a:buSzPct val="100000"/>
               <a:buChar char="•"/>
             </a:pPr>
             <a:r>
-              <a:rPr lang="en-US" sz="1700" dirty="0">
+              <a:rPr lang="en-US" sz="1900" dirty="0">
                 <a:solidFill>
                   <a:srgbClr val="141B26"/>
                 </a:solidFill>
               </a:rPr>
               <a:t>Charles Darwin and Alfred Russel Wallace both developed the hypothesis that natural selection causes evolution.</a:t>
             </a:r>
-            <a:endParaRPr lang="en-US" sz="1700" dirty="0"/>
-          </a:p>
-          <a:p>
-            <a:pPr marL="228600" indent="-228600">
+            <a:endParaRPr lang="en-US" sz="1900" dirty="0"/>
+          </a:p>
+          <a:p>
+            <a:pPr marL="304800" indent="-304800">
               <a:spcAft>
-                <a:spcPts val="600"/>
+                <a:spcPts val="800"/>
               </a:spcAft>
               <a:buSzPct val="100000"/>
               <a:buChar char="•"/>
             </a:pPr>
             <a:r>
-              <a:rPr lang="en-US" sz="1700" dirty="0">
+              <a:rPr lang="en-US" sz="1900" dirty="0">
                 <a:solidFill>
                   <a:srgbClr val="141B26"/>
                 </a:solidFill>
               </a:rPr>
               <a:t>Tested many times with evidence, it is now the theory of evolution by natural selection.</a:t>
             </a:r>
-            <a:endParaRPr lang="en-US" sz="1700" dirty="0"/>
-          </a:p>
-          <a:p>
-            <a:pPr marL="228600" indent="-228600">
+            <a:endParaRPr lang="en-US" sz="1900" dirty="0"/>
+          </a:p>
+          <a:p>
+            <a:pPr marL="304800" indent="-304800">
               <a:spcAft>
-                <a:spcPts val="600"/>
+                <a:spcPts val="800"/>
               </a:spcAft>
               <a:buSzPct val="100000"/>
               <a:buChar char="•"/>
             </a:pPr>
             <a:r>
-              <a:rPr lang="en-US" sz="1700" dirty="0">
+              <a:rPr lang="en-US" sz="1900" dirty="0">
                 <a:solidFill>
                   <a:srgbClr val="141B26"/>
                 </a:solidFill>
               </a:rPr>
               <a:t>Darwin's theory says a population can evolve into a new species. Many scientists think some dinosaurs evolved into birds over millions of years.</a:t>
             </a:r>
-            <a:endParaRPr lang="en-US" sz="1700" dirty="0"/>
+            <a:endParaRPr lang="en-US" sz="1900" dirty="0"/>
           </a:p>
         </p:txBody>
       </p:sp>
@@ -8221,7 +8106,7 @@
         <p:spPr>
           <a:xfrm>
             <a:off x="6583680" y="4983480"/>
-            <a:ext cx="5029200" cy="502920"/>
+            <a:ext cx="5029200" cy="548640"/>
           </a:xfrm>
           <a:prstGeom prst="rect">
             <a:avLst/>
@@ -8237,7 +8122,7 @@
               <a:buNone/>
             </a:pPr>
             <a:r>
-              <a:rPr lang="en-US" sz="1100" dirty="0">
+              <a:rPr lang="en-US" sz="1300" dirty="0">
                 <a:solidFill>
                   <a:srgbClr val="141B26"/>
                 </a:solidFill>
@@ -8247,21 +8132,21 @@
             <a:pPr algn="l" indent="0" marL="0">
               <a:buNone/>
             </a:pPr>
-            <a:endParaRPr lang="en-US" sz="1100" dirty="0"/>
+            <a:endParaRPr lang="en-US" sz="1300" dirty="0"/>
           </a:p>
           <a:p>
             <a:pPr algn="l" indent="0" marL="0">
               <a:buNone/>
             </a:pPr>
             <a:r>
-              <a:rPr lang="en-US" sz="800" dirty="0">
+              <a:rPr lang="en-US" sz="900" dirty="0">
                 <a:solidFill>
                   <a:srgbClr val="5B6574"/>
                 </a:solidFill>
               </a:rPr>
               <a:t>Image: virtusincertus, CC BY 2.0, via Wikimedia Commons</a:t>
             </a:r>
-            <a:endParaRPr lang="en-US" sz="1100" dirty="0"/>
+            <a:endParaRPr lang="en-US" sz="1300" dirty="0"/>
           </a:p>
         </p:txBody>
       </p:sp>
@@ -8308,16 +8193,14 @@
           <a:ln/>
         </p:spPr>
         <p:txBody>
-          <a:bodyPr wrap="square" lIns="0" tIns="0" rIns="0" bIns="0" rtlCol="0" anchor="ctr">
-            <a:normAutofit/>
-          </a:bodyPr>
+          <a:bodyPr wrap="square" lIns="0" tIns="0" rIns="0" bIns="0" rtlCol="0" anchor="ctr"/>
           <a:lstStyle/>
           <a:p>
             <a:pPr indent="0" marL="0">
               <a:buNone/>
             </a:pPr>
             <a:r>
-              <a:rPr lang="en-US" sz="1400" b="1" dirty="0">
+              <a:rPr lang="en-US" sz="1700" b="1" dirty="0">
                 <a:solidFill>
                   <a:srgbClr val="7B3A8E"/>
                 </a:solidFill>
@@ -8328,14 +8211,14 @@
               <a:buNone/>
             </a:pPr>
             <a:r>
-              <a:rPr lang="en-US" sz="1400" dirty="0">
+              <a:rPr lang="en-US" sz="1700" dirty="0">
                 <a:solidFill>
                   <a:srgbClr val="141B26"/>
                 </a:solidFill>
               </a:rPr>
               <a:t>A hypothesis becomes a theory when it has been tested many times and the evidence supports it.</a:t>
             </a:r>
-            <a:endParaRPr lang="en-US" sz="1400" dirty="0"/>
+            <a:endParaRPr lang="en-US" sz="1700" dirty="0"/>
           </a:p>
         </p:txBody>
       </p:sp>
@@ -8518,8 +8401,8 @@
         </p:nvSpPr>
         <p:spPr>
           <a:xfrm>
-            <a:off x="548640" y="6053328"/>
-            <a:ext cx="9601200" cy="292608"/>
+            <a:off x="548640" y="6035040"/>
+            <a:ext cx="9601200" cy="310896"/>
           </a:xfrm>
           <a:prstGeom prst="rect">
             <a:avLst/>
@@ -8535,7 +8418,7 @@
               <a:buNone/>
             </a:pPr>
             <a:r>
-              <a:rPr lang="en-US" sz="1200" b="1" dirty="0">
+              <a:rPr lang="en-US" sz="1400" b="1" dirty="0">
                 <a:solidFill>
                   <a:srgbClr val="7B3A8E"/>
                 </a:solidFill>
@@ -8546,14 +8429,14 @@
               <a:buNone/>
             </a:pPr>
             <a:r>
-              <a:rPr lang="en-US" sz="1200" dirty="0">
+              <a:rPr lang="en-US" sz="1400" dirty="0">
                 <a:solidFill>
                   <a:srgbClr val="7B3A8E"/>
                 </a:solidFill>
               </a:rPr>
               <a:t>natural selection   ·   inherited variation</a:t>
             </a:r>
-            <a:endParaRPr lang="en-US" sz="1200" dirty="0"/>
+            <a:endParaRPr lang="en-US" sz="1400" dirty="0"/>
           </a:p>
         </p:txBody>
       </p:sp>
@@ -8609,14 +8492,14 @@
               <a:buNone/>
             </a:pPr>
             <a:r>
-              <a:rPr lang="en-US" sz="2000" b="1" dirty="0">
+              <a:rPr lang="en-US" sz="2200" b="1" dirty="0">
                 <a:solidFill>
                   <a:srgbClr val="0F2A5F"/>
                 </a:solidFill>
               </a:rPr>
               <a:t>Lamarck would say (not accepted)</a:t>
             </a:r>
-            <a:endParaRPr lang="en-US" sz="2000" dirty="0"/>
+            <a:endParaRPr lang="en-US" sz="2200" dirty="0"/>
           </a:p>
         </p:txBody>
       </p:sp>
@@ -8638,81 +8521,79 @@
           <a:ln/>
         </p:spPr>
         <p:txBody>
-          <a:bodyPr wrap="square" lIns="0" tIns="0" rIns="0" bIns="0" rtlCol="0" anchor="t">
-            <a:normAutofit/>
-          </a:bodyPr>
-          <a:lstStyle/>
-          <a:p>
-            <a:pPr marL="228600" indent="-228600">
+          <a:bodyPr wrap="square" lIns="0" tIns="0" rIns="0" bIns="0" rtlCol="0" anchor="t"/>
+          <a:lstStyle/>
+          <a:p>
+            <a:pPr marL="304800" indent="-304800">
               <a:spcAft>
-                <a:spcPts val="600"/>
+                <a:spcPts val="800"/>
               </a:spcAft>
               <a:buSzPct val="100000"/>
               <a:buChar char="•"/>
             </a:pPr>
             <a:r>
-              <a:rPr lang="en-US" sz="1500" dirty="0">
+              <a:rPr lang="en-US" sz="1800" dirty="0">
                 <a:solidFill>
                   <a:srgbClr val="141B26"/>
                 </a:solidFill>
               </a:rPr>
               <a:t>Birds that waded deeper got more fish.</a:t>
             </a:r>
-            <a:endParaRPr lang="en-US" sz="1500" dirty="0"/>
-          </a:p>
-          <a:p>
-            <a:pPr marL="228600" indent="-228600">
+            <a:endParaRPr lang="en-US" sz="1800" dirty="0"/>
+          </a:p>
+          <a:p>
+            <a:pPr marL="304800" indent="-304800">
               <a:spcAft>
-                <a:spcPts val="600"/>
+                <a:spcPts val="800"/>
               </a:spcAft>
               <a:buSzPct val="100000"/>
               <a:buChar char="•"/>
             </a:pPr>
             <a:r>
-              <a:rPr lang="en-US" sz="1500" dirty="0">
+              <a:rPr lang="en-US" sz="1800" dirty="0">
                 <a:solidFill>
                   <a:srgbClr val="141B26"/>
                 </a:solidFill>
               </a:rPr>
               <a:t>When fish were scarce, the birds stretched their legs a bit.</a:t>
             </a:r>
-            <a:endParaRPr lang="en-US" sz="1500" dirty="0"/>
-          </a:p>
-          <a:p>
-            <a:pPr marL="228600" indent="-228600">
+            <a:endParaRPr lang="en-US" sz="1800" dirty="0"/>
+          </a:p>
+          <a:p>
+            <a:pPr marL="304800" indent="-304800">
               <a:spcAft>
-                <a:spcPts val="600"/>
+                <a:spcPts val="800"/>
               </a:spcAft>
               <a:buSzPct val="100000"/>
               <a:buChar char="•"/>
             </a:pPr>
             <a:r>
-              <a:rPr lang="en-US" sz="1500" dirty="0">
+              <a:rPr lang="en-US" sz="1800" dirty="0">
                 <a:solidFill>
                   <a:srgbClr val="141B26"/>
                 </a:solidFill>
               </a:rPr>
               <a:t>They passed their stretched legs to their offspring.</a:t>
             </a:r>
-            <a:endParaRPr lang="en-US" sz="1500" dirty="0"/>
-          </a:p>
-          <a:p>
-            <a:pPr marL="228600" indent="-228600">
+            <a:endParaRPr lang="en-US" sz="1800" dirty="0"/>
+          </a:p>
+          <a:p>
+            <a:pPr marL="304800" indent="-304800">
               <a:spcAft>
-                <a:spcPts val="600"/>
+                <a:spcPts val="800"/>
               </a:spcAft>
               <a:buSzPct val="100000"/>
               <a:buChar char="•"/>
             </a:pPr>
             <a:r>
-              <a:rPr lang="en-US" sz="1500" dirty="0">
+              <a:rPr lang="en-US" sz="1800" dirty="0">
                 <a:solidFill>
                   <a:srgbClr val="141B26"/>
                 </a:solidFill>
               </a:rPr>
               <a:t>Over time, legs got longer and longer.</a:t>
             </a:r>
-            <a:endParaRPr lang="en-US" sz="1500" dirty="0"/>
+            <a:endParaRPr lang="en-US" sz="1800" dirty="0"/>
           </a:p>
         </p:txBody>
       </p:sp>
@@ -8768,14 +8649,14 @@
               <a:buNone/>
             </a:pPr>
             <a:r>
-              <a:rPr lang="en-US" sz="2000" b="1" dirty="0">
+              <a:rPr lang="en-US" sz="2200" b="1" dirty="0">
                 <a:solidFill>
                   <a:srgbClr val="0F2A5F"/>
                 </a:solidFill>
               </a:rPr>
               <a:t>Darwin would say</a:t>
             </a:r>
-            <a:endParaRPr lang="en-US" sz="2000" dirty="0"/>
+            <a:endParaRPr lang="en-US" sz="2200" dirty="0"/>
           </a:p>
         </p:txBody>
       </p:sp>
@@ -8797,81 +8678,79 @@
           <a:ln/>
         </p:spPr>
         <p:txBody>
-          <a:bodyPr wrap="square" lIns="0" tIns="0" rIns="0" bIns="0" rtlCol="0" anchor="t">
-            <a:normAutofit/>
-          </a:bodyPr>
-          <a:lstStyle/>
-          <a:p>
-            <a:pPr marL="228600" indent="-228600">
+          <a:bodyPr wrap="square" lIns="0" tIns="0" rIns="0" bIns="0" rtlCol="0" anchor="t"/>
+          <a:lstStyle/>
+          <a:p>
+            <a:pPr marL="304800" indent="-304800">
               <a:spcAft>
-                <a:spcPts val="600"/>
+                <a:spcPts val="800"/>
               </a:spcAft>
               <a:buSzPct val="100000"/>
               <a:buChar char="•"/>
             </a:pPr>
             <a:r>
-              <a:rPr lang="en-US" sz="1500" dirty="0">
+              <a:rPr lang="en-US" sz="1800" dirty="0">
                 <a:solidFill>
                   <a:srgbClr val="141B26"/>
                 </a:solidFill>
               </a:rPr>
               <a:t>Birds varied in leg length because of their genes.</a:t>
             </a:r>
-            <a:endParaRPr lang="en-US" sz="1500" dirty="0"/>
-          </a:p>
-          <a:p>
-            <a:pPr marL="228600" indent="-228600">
+            <a:endParaRPr lang="en-US" sz="1800" dirty="0"/>
+          </a:p>
+          <a:p>
+            <a:pPr marL="304800" indent="-304800">
               <a:spcAft>
-                <a:spcPts val="600"/>
+                <a:spcPts val="800"/>
               </a:spcAft>
               <a:buSzPct val="100000"/>
               <a:buChar char="•"/>
             </a:pPr>
             <a:r>
-              <a:rPr lang="en-US" sz="1500" dirty="0">
+              <a:rPr lang="en-US" sz="1800" dirty="0">
                 <a:solidFill>
                   <a:srgbClr val="141B26"/>
                 </a:solidFill>
               </a:rPr>
               <a:t>When fish were scarce, longer-legged birds waded deeper and got more fish.</a:t>
             </a:r>
-            <a:endParaRPr lang="en-US" sz="1500" dirty="0"/>
-          </a:p>
-          <a:p>
-            <a:pPr marL="228600" indent="-228600">
+            <a:endParaRPr lang="en-US" sz="1800" dirty="0"/>
+          </a:p>
+          <a:p>
+            <a:pPr marL="304800" indent="-304800">
               <a:spcAft>
-                <a:spcPts val="600"/>
+                <a:spcPts val="800"/>
               </a:spcAft>
               <a:buSzPct val="100000"/>
               <a:buChar char="•"/>
             </a:pPr>
             <a:r>
-              <a:rPr lang="en-US" sz="1500" dirty="0">
+              <a:rPr lang="en-US" sz="1800" dirty="0">
                 <a:solidFill>
                   <a:srgbClr val="141B26"/>
                 </a:solidFill>
               </a:rPr>
               <a:t>More of them survived and reproduced, passing on long-leg genes.</a:t>
             </a:r>
-            <a:endParaRPr lang="en-US" sz="1500" dirty="0"/>
-          </a:p>
-          <a:p>
-            <a:pPr marL="228600" indent="-228600">
+            <a:endParaRPr lang="en-US" sz="1800" dirty="0"/>
+          </a:p>
+          <a:p>
+            <a:pPr marL="304800" indent="-304800">
               <a:spcAft>
-                <a:spcPts val="600"/>
+                <a:spcPts val="800"/>
               </a:spcAft>
               <a:buSzPct val="100000"/>
               <a:buChar char="•"/>
             </a:pPr>
             <a:r>
-              <a:rPr lang="en-US" sz="1500" dirty="0">
+              <a:rPr lang="en-US" sz="1800" dirty="0">
                 <a:solidFill>
                   <a:srgbClr val="141B26"/>
                 </a:solidFill>
               </a:rPr>
               <a:t>Each generation had more long-legged birds.</a:t>
             </a:r>
-            <a:endParaRPr lang="en-US" sz="1500" dirty="0"/>
+            <a:endParaRPr lang="en-US" sz="1800" dirty="0"/>
           </a:p>
         </p:txBody>
       </p:sp>
@@ -8918,16 +8797,14 @@
           <a:ln/>
         </p:spPr>
         <p:txBody>
-          <a:bodyPr wrap="square" lIns="0" tIns="0" rIns="0" bIns="0" rtlCol="0" anchor="ctr">
-            <a:normAutofit/>
-          </a:bodyPr>
+          <a:bodyPr wrap="square" lIns="0" tIns="0" rIns="0" bIns="0" rtlCol="0" anchor="ctr"/>
           <a:lstStyle/>
           <a:p>
             <a:pPr indent="0" marL="0">
               <a:buNone/>
             </a:pPr>
             <a:r>
-              <a:rPr lang="en-US" sz="1400" b="1" dirty="0">
+              <a:rPr lang="en-US" sz="1700" b="1" dirty="0">
                 <a:solidFill>
                   <a:srgbClr val="7B3A8E"/>
                 </a:solidFill>
@@ -8938,14 +8815,14 @@
               <a:buNone/>
             </a:pPr>
             <a:r>
-              <a:rPr lang="en-US" sz="1400" dirty="0">
+              <a:rPr lang="en-US" sz="1700" dirty="0">
                 <a:solidFill>
                   <a:srgbClr val="141B26"/>
                 </a:solidFill>
               </a:rPr>
               <a:t>Changes made during an organism's life (stretching, training, a scar) are not inherited. Only genes are passed on.</a:t>
             </a:r>
-            <a:endParaRPr lang="en-US" sz="1400" dirty="0"/>
+            <a:endParaRPr lang="en-US" sz="1700" dirty="0"/>
           </a:p>
         </p:txBody>
       </p:sp>
@@ -9145,14 +9022,14 @@
               <a:buNone/>
             </a:pPr>
             <a:r>
-              <a:rPr lang="en-US" sz="1400" i="1" dirty="0">
+              <a:rPr lang="en-US" sz="1600" i="1" dirty="0">
                 <a:solidFill>
                   <a:srgbClr val="5B6574"/>
                 </a:solidFill>
               </a:rPr>
               <a:t>Mini whiteboards. Short answers.</a:t>
             </a:r>
-            <a:endParaRPr lang="en-US" sz="1400" dirty="0"/>
+            <a:endParaRPr lang="en-US" sz="1600" dirty="0"/>
           </a:p>
         </p:txBody>
       </p:sp>
@@ -9201,16 +9078,14 @@
           <a:ln/>
         </p:spPr>
         <p:txBody>
-          <a:bodyPr wrap="square" lIns="0" tIns="0" rIns="0" bIns="0" rtlCol="0" anchor="ctr">
-            <a:normAutofit/>
-          </a:bodyPr>
+          <a:bodyPr wrap="square" lIns="0" tIns="0" rIns="0" bIns="0" rtlCol="0" anchor="ctr"/>
           <a:lstStyle/>
           <a:p>
             <a:pPr indent="0" marL="0">
               <a:buNone/>
             </a:pPr>
             <a:r>
-              <a:rPr lang="en-US" sz="1600" b="1" dirty="0">
+              <a:rPr lang="en-US" sz="2000" b="1" dirty="0">
                 <a:solidFill>
                   <a:srgbClr val="7B3A8E"/>
                 </a:solidFill>
@@ -9221,14 +9096,14 @@
               <a:buNone/>
             </a:pPr>
             <a:r>
-              <a:rPr lang="en-US" sz="1600" dirty="0">
+              <a:rPr lang="en-US" sz="2000" dirty="0">
                 <a:solidFill>
                   <a:srgbClr val="141B26"/>
                 </a:solidFill>
               </a:rPr>
               <a:t>What causes inherited variation?</a:t>
             </a:r>
-            <a:endParaRPr lang="en-US" sz="1600" dirty="0"/>
+            <a:endParaRPr lang="en-US" sz="2000" dirty="0"/>
           </a:p>
         </p:txBody>
       </p:sp>
@@ -9277,16 +9152,14 @@
           <a:ln/>
         </p:spPr>
         <p:txBody>
-          <a:bodyPr wrap="square" lIns="0" tIns="0" rIns="0" bIns="0" rtlCol="0" anchor="ctr">
-            <a:normAutofit/>
-          </a:bodyPr>
+          <a:bodyPr wrap="square" lIns="0" tIns="0" rIns="0" bIns="0" rtlCol="0" anchor="ctr"/>
           <a:lstStyle/>
           <a:p>
             <a:pPr indent="0" marL="0">
               <a:buNone/>
             </a:pPr>
             <a:r>
-              <a:rPr lang="en-US" sz="1600" b="1" dirty="0">
+              <a:rPr lang="en-US" sz="2000" b="1" dirty="0">
                 <a:solidFill>
                   <a:srgbClr val="7B3A8E"/>
                 </a:solidFill>
@@ -9297,14 +9170,14 @@
               <a:buNone/>
             </a:pPr>
             <a:r>
-              <a:rPr lang="en-US" sz="1600" dirty="0">
+              <a:rPr lang="en-US" sz="2000" dirty="0">
                 <a:solidFill>
                   <a:srgbClr val="141B26"/>
                 </a:solidFill>
               </a:rPr>
               <a:t>In the 1890s, which moth was better camouflaged on a sooty tree?</a:t>
             </a:r>
-            <a:endParaRPr lang="en-US" sz="1600" dirty="0"/>
+            <a:endParaRPr lang="en-US" sz="2000" dirty="0"/>
           </a:p>
         </p:txBody>
       </p:sp>
@@ -9353,16 +9226,14 @@
           <a:ln/>
         </p:spPr>
         <p:txBody>
-          <a:bodyPr wrap="square" lIns="0" tIns="0" rIns="0" bIns="0" rtlCol="0" anchor="ctr">
-            <a:normAutofit/>
-          </a:bodyPr>
+          <a:bodyPr wrap="square" lIns="0" tIns="0" rIns="0" bIns="0" rtlCol="0" anchor="ctr"/>
           <a:lstStyle/>
           <a:p>
             <a:pPr indent="0" marL="0">
               <a:buNone/>
             </a:pPr>
             <a:r>
-              <a:rPr lang="en-US" sz="1600" b="1" dirty="0">
+              <a:rPr lang="en-US" sz="2000" b="1" dirty="0">
                 <a:solidFill>
                   <a:srgbClr val="7B3A8E"/>
                 </a:solidFill>
@@ -9373,14 +9244,14 @@
               <a:buNone/>
             </a:pPr>
             <a:r>
-              <a:rPr lang="en-US" sz="1600" dirty="0">
+              <a:rPr lang="en-US" sz="2000" dirty="0">
                 <a:solidFill>
                   <a:srgbClr val="141B26"/>
                 </a:solidFill>
               </a:rPr>
               <a:t>Does natural selection change an individual moth, or the population over generations?</a:t>
             </a:r>
-            <a:endParaRPr lang="en-US" sz="1600" dirty="0"/>
+            <a:endParaRPr lang="en-US" sz="2000" dirty="0"/>
           </a:p>
         </p:txBody>
       </p:sp>
@@ -9429,16 +9300,14 @@
           <a:ln/>
         </p:spPr>
         <p:txBody>
-          <a:bodyPr wrap="square" lIns="0" tIns="0" rIns="0" bIns="0" rtlCol="0" anchor="ctr">
-            <a:normAutofit/>
-          </a:bodyPr>
+          <a:bodyPr wrap="square" lIns="0" tIns="0" rIns="0" bIns="0" rtlCol="0" anchor="ctr"/>
           <a:lstStyle/>
           <a:p>
             <a:pPr indent="0" marL="0">
               <a:buNone/>
             </a:pPr>
             <a:r>
-              <a:rPr lang="en-US" sz="1600" b="1" dirty="0">
+              <a:rPr lang="en-US" sz="2000" b="1" dirty="0">
                 <a:solidFill>
                   <a:srgbClr val="7B3A8E"/>
                 </a:solidFill>
@@ -9449,14 +9318,14 @@
               <a:buNone/>
             </a:pPr>
             <a:r>
-              <a:rPr lang="en-US" sz="1600" dirty="0">
+              <a:rPr lang="en-US" sz="2000" dirty="0">
                 <a:solidFill>
                   <a:srgbClr val="141B26"/>
                 </a:solidFill>
               </a:rPr>
               <a:t>What is the difference between a hypothesis and a theory?</a:t>
             </a:r>
-            <a:endParaRPr lang="en-US" sz="1600" dirty="0"/>
+            <a:endParaRPr lang="en-US" sz="2000" dirty="0"/>
           </a:p>
         </p:txBody>
       </p:sp>
@@ -9505,16 +9374,14 @@
           <a:ln/>
         </p:spPr>
         <p:txBody>
-          <a:bodyPr wrap="square" lIns="0" tIns="0" rIns="0" bIns="0" rtlCol="0" anchor="ctr">
-            <a:normAutofit/>
-          </a:bodyPr>
+          <a:bodyPr wrap="square" lIns="0" tIns="0" rIns="0" bIns="0" rtlCol="0" anchor="ctr"/>
           <a:lstStyle/>
           <a:p>
             <a:pPr indent="0" marL="0">
               <a:buNone/>
             </a:pPr>
             <a:r>
-              <a:rPr lang="en-US" sz="1600" b="1" dirty="0">
+              <a:rPr lang="en-US" sz="2000" b="1" dirty="0">
                 <a:solidFill>
                   <a:srgbClr val="7B3A8E"/>
                 </a:solidFill>
@@ -9525,14 +9392,14 @@
               <a:buNone/>
             </a:pPr>
             <a:r>
-              <a:rPr lang="en-US" sz="1600" dirty="0">
+              <a:rPr lang="en-US" sz="2000" dirty="0">
                 <a:solidFill>
                   <a:srgbClr val="141B26"/>
                 </a:solidFill>
               </a:rPr>
               <a:t>A cloned mammoth would have the same what as the original?</a:t>
             </a:r>
-            <a:endParaRPr lang="en-US" sz="1600" dirty="0"/>
+            <a:endParaRPr lang="en-US" sz="2000" dirty="0"/>
           </a:p>
         </p:txBody>
       </p:sp>
